--- a/a7/build/out/u3/A7 3.T1  Slides.pptx
+++ b/a7/build/out/u3/A7 3.T1  Slides.pptx
@@ -38,6 +38,7 @@
     <p:sldId id="286" r:id="rId37"/>
     <p:sldId id="287" r:id="rId38"/>
     <p:sldId id="288" r:id="rId39"/>
+    <p:sldId id="289" r:id="rId40"/>
   </p:sldIdLst>
   <p:sldSz cx="12191969" cy="6858000" type="screen4x3"/>
   <p:notesSz cx="6858000" cy="9144000"/>
@@ -7182,9 +7183,44 @@
           </a:p>
         </p:txBody>
       </p:sp>
+      <p:sp>
+        <p:nvSpPr>
+          <p:cNvPr id="9" name="TextBox 8"/>
+          <p:cNvSpPr txBox="1"/>
+          <p:nvPr/>
+        </p:nvSpPr>
+        <p:spPr>
+          <a:xfrm>
+            <a:off x="3084067" y="2171700"/>
+            <a:ext cx="3129280" cy="457200"/>
+          </a:xfrm>
+          <a:prstGeom prst="rect">
+            <a:avLst/>
+          </a:prstGeom>
+          <a:noFill/>
+        </p:spPr>
+        <p:txBody>
+          <a:bodyPr wrap="none" lIns="45720" rIns="45720" tIns="18288" bIns="18288" anchor="ctr">
+            <a:spAutoFit/>
+          </a:bodyPr>
+          <a:lstStyle/>
+          <a:p>
+            <a:pPr algn="l"/>
+            <a:r>
+              <a:rPr sz="2600" b="0" i="0">
+                <a:solidFill>
+                  <a:srgbClr val="1A1A1A"/>
+                </a:solidFill>
+                <a:latin typeface="Century Schoolbook"/>
+              </a:rPr>
+              <a:t>A cube has edge  </a:t>
+            </a:r>
+          </a:p>
+        </p:txBody>
+      </p:sp>
       <p:pic>
         <p:nvPicPr>
-          <p:cNvPr id="9" name="Picture 8" descr="d3892a12ffc5c1d1.png"/>
+          <p:cNvPr id="10" name="Picture 9" descr="7234be0b0114cb8c.png"/>
           <p:cNvPicPr>
             <a:picLocks noChangeAspect="1"/>
           </p:cNvPicPr>
@@ -7198,8 +7234,8 @@
         </p:blipFill>
         <p:spPr>
           <a:xfrm>
-            <a:off x="5480304" y="2194560"/>
-            <a:ext cx="1200912" cy="518160"/>
+            <a:off x="6076188" y="2228088"/>
+            <a:ext cx="524256" cy="344424"/>
           </a:xfrm>
           <a:prstGeom prst="rect">
             <a:avLst/>
@@ -7208,7 +7244,171 @@
       </p:pic>
       <p:sp>
         <p:nvSpPr>
-          <p:cNvPr id="10" name="TextBox 9"/>
+          <p:cNvPr id="11" name="TextBox 10"/>
+          <p:cNvSpPr txBox="1"/>
+          <p:nvPr/>
+        </p:nvSpPr>
+        <p:spPr>
+          <a:xfrm>
+            <a:off x="6600444" y="2171700"/>
+            <a:ext cx="2614168" cy="457200"/>
+          </a:xfrm>
+          <a:prstGeom prst="rect">
+            <a:avLst/>
+          </a:prstGeom>
+          <a:noFill/>
+        </p:spPr>
+        <p:txBody>
+          <a:bodyPr wrap="none" lIns="45720" rIns="45720" tIns="18288" bIns="18288" anchor="ctr">
+            <a:spAutoFit/>
+          </a:bodyPr>
+          <a:lstStyle/>
+          <a:p>
+            <a:pPr algn="l"/>
+            <a:r>
+              <a:rPr sz="2600" b="0" i="0">
+                <a:solidFill>
+                  <a:srgbClr val="1A1A1A"/>
+                </a:solidFill>
+                <a:latin typeface="Century Schoolbook"/>
+              </a:rPr>
+              <a:t>  centimeters.</a:t>
+            </a:r>
+          </a:p>
+        </p:txBody>
+      </p:sp>
+      <p:sp>
+        <p:nvSpPr>
+          <p:cNvPr id="12" name="TextBox 11"/>
+          <p:cNvSpPr txBox="1"/>
+          <p:nvPr/>
+        </p:nvSpPr>
+        <p:spPr>
+          <a:xfrm>
+            <a:off x="2034539" y="2857500"/>
+            <a:ext cx="3816096" cy="457200"/>
+          </a:xfrm>
+          <a:prstGeom prst="rect">
+            <a:avLst/>
+          </a:prstGeom>
+          <a:noFill/>
+        </p:spPr>
+        <p:txBody>
+          <a:bodyPr wrap="none" lIns="45720" rIns="45720" tIns="18288" bIns="18288" anchor="ctr">
+            <a:spAutoFit/>
+          </a:bodyPr>
+          <a:lstStyle/>
+          <a:p>
+            <a:pPr algn="l"/>
+            <a:r>
+              <a:rPr sz="2600" b="0" i="0">
+                <a:solidFill>
+                  <a:srgbClr val="1A1A1A"/>
+                </a:solidFill>
+                <a:latin typeface="Century Schoolbook"/>
+              </a:rPr>
+              <a:t>Its surface area is  </a:t>
+            </a:r>
+          </a:p>
+        </p:txBody>
+      </p:sp>
+      <p:pic>
+        <p:nvPicPr>
+          <p:cNvPr id="13" name="Picture 12" descr="cf9ea632c43208c2.png"/>
+          <p:cNvPicPr>
+            <a:picLocks noChangeAspect="1"/>
+          </p:cNvPicPr>
+          <p:nvPr/>
+        </p:nvPicPr>
+        <p:blipFill>
+          <a:blip r:embed="rId3"/>
+          <a:stretch>
+            <a:fillRect/>
+          </a:stretch>
+        </p:blipFill>
+        <p:spPr>
+          <a:xfrm>
+            <a:off x="5713476" y="2912364"/>
+            <a:ext cx="734568" cy="347472"/>
+          </a:xfrm>
+          <a:prstGeom prst="rect">
+            <a:avLst/>
+          </a:prstGeom>
+        </p:spPr>
+      </p:pic>
+      <p:sp>
+        <p:nvSpPr>
+          <p:cNvPr id="14" name="TextBox 13"/>
+          <p:cNvSpPr txBox="1"/>
+          <p:nvPr/>
+        </p:nvSpPr>
+        <p:spPr>
+          <a:xfrm>
+            <a:off x="6448044" y="2857500"/>
+            <a:ext cx="3816096" cy="457200"/>
+          </a:xfrm>
+          <a:prstGeom prst="rect">
+            <a:avLst/>
+          </a:prstGeom>
+          <a:noFill/>
+        </p:spPr>
+        <p:txBody>
+          <a:bodyPr wrap="none" lIns="45720" rIns="45720" tIns="18288" bIns="18288" anchor="ctr">
+            <a:spAutoFit/>
+          </a:bodyPr>
+          <a:lstStyle/>
+          <a:p>
+            <a:pPr algn="l"/>
+            <a:r>
+              <a:rPr sz="2600" b="0" i="0">
+                <a:solidFill>
+                  <a:srgbClr val="1A1A1A"/>
+                </a:solidFill>
+                <a:latin typeface="Century Schoolbook"/>
+              </a:rPr>
+              <a:t>  square centimeters.</a:t>
+            </a:r>
+          </a:p>
+        </p:txBody>
+      </p:sp>
+      <p:sp>
+        <p:nvSpPr>
+          <p:cNvPr id="15" name="TextBox 14"/>
+          <p:cNvSpPr txBox="1"/>
+          <p:nvPr/>
+        </p:nvSpPr>
+        <p:spPr>
+          <a:xfrm>
+            <a:off x="777240" y="3566160"/>
+            <a:ext cx="10607040" cy="465151"/>
+          </a:xfrm>
+          <a:prstGeom prst="rect">
+            <a:avLst/>
+          </a:prstGeom>
+          <a:noFill/>
+        </p:spPr>
+        <p:txBody>
+          <a:bodyPr wrap="square" lIns="45720" rIns="45720" tIns="18288" bIns="18288" anchor="t">
+            <a:spAutoFit/>
+          </a:bodyPr>
+          <a:lstStyle/>
+          <a:p>
+            <a:pPr algn="ctr"/>
+            <a:r>
+              <a:rPr sz="2600" b="0" i="0">
+                <a:solidFill>
+                  <a:srgbClr val="1A1A1A"/>
+                </a:solidFill>
+                <a:latin typeface="Century Schoolbook"/>
+              </a:rPr>
+              <a:t>Write the cube's volume as a single monomial.</a:t>
+            </a:r>
+          </a:p>
+        </p:txBody>
+      </p:sp>
+      <p:sp>
+        <p:nvSpPr>
+          <p:cNvPr id="16" name="TextBox 15"/>
           <p:cNvSpPr txBox="1"/>
           <p:nvPr/>
         </p:nvSpPr>
@@ -7243,7 +7443,7 @@
       </p:sp>
       <p:sp>
         <p:nvSpPr>
-          <p:cNvPr id="11" name="TextBox 10"/>
+          <p:cNvPr id="17" name="TextBox 16"/>
           <p:cNvSpPr txBox="1"/>
           <p:nvPr/>
         </p:nvSpPr>
@@ -8073,9 +8273,44 @@
           </a:p>
         </p:txBody>
       </p:sp>
+      <p:sp>
+        <p:nvSpPr>
+          <p:cNvPr id="9" name="TextBox 8"/>
+          <p:cNvSpPr txBox="1"/>
+          <p:nvPr/>
+        </p:nvSpPr>
+        <p:spPr>
+          <a:xfrm>
+            <a:off x="3084067" y="2080260"/>
+            <a:ext cx="3129280" cy="457200"/>
+          </a:xfrm>
+          <a:prstGeom prst="rect">
+            <a:avLst/>
+          </a:prstGeom>
+          <a:noFill/>
+        </p:spPr>
+        <p:txBody>
+          <a:bodyPr wrap="none" lIns="45720" rIns="45720" tIns="18288" bIns="18288" anchor="ctr">
+            <a:spAutoFit/>
+          </a:bodyPr>
+          <a:lstStyle/>
+          <a:p>
+            <a:pPr algn="l"/>
+            <a:r>
+              <a:rPr sz="2600" b="0" i="0">
+                <a:solidFill>
+                  <a:srgbClr val="1A1A1A"/>
+                </a:solidFill>
+                <a:latin typeface="Century Schoolbook"/>
+              </a:rPr>
+              <a:t>A cube has edge  </a:t>
+            </a:r>
+          </a:p>
+        </p:txBody>
+      </p:sp>
       <p:pic>
         <p:nvPicPr>
-          <p:cNvPr id="9" name="Picture 8" descr="d3892a12ffc5c1d1.png"/>
+          <p:cNvPr id="10" name="Picture 9" descr="7234be0b0114cb8c.png"/>
           <p:cNvPicPr>
             <a:picLocks noChangeAspect="1"/>
           </p:cNvPicPr>
@@ -8089,8 +8324,8 @@
         </p:blipFill>
         <p:spPr>
           <a:xfrm>
-            <a:off x="5480304" y="2103120"/>
-            <a:ext cx="1200912" cy="518160"/>
+            <a:off x="6076188" y="2136648"/>
+            <a:ext cx="524256" cy="344424"/>
           </a:xfrm>
           <a:prstGeom prst="rect">
             <a:avLst/>
@@ -8099,104 +8334,77 @@
       </p:pic>
       <p:sp>
         <p:nvSpPr>
-          <p:cNvPr id="10" name="TextBox 9"/>
-          <p:cNvSpPr txBox="1"/>
-          <p:nvPr/>
-        </p:nvSpPr>
-        <p:spPr>
-          <a:xfrm>
-            <a:off x="1828800" y="2895599"/>
-            <a:ext cx="8503920" cy="548640"/>
-          </a:xfrm>
-          <a:prstGeom prst="rect">
-            <a:avLst/>
-          </a:prstGeom>
-          <a:noFill/>
-        </p:spPr>
-        <p:txBody>
-          <a:bodyPr wrap="square" lIns="45720" rIns="45720" tIns="18288" bIns="18288" anchor="t">
-            <a:spAutoFit/>
-          </a:bodyPr>
-          <a:lstStyle/>
-          <a:p>
-            <a:pPr algn="ctr"/>
-            <a:r>
-              <a:rPr sz="2400" b="0" i="0">
-                <a:solidFill>
-                  <a:srgbClr val="6B6B6B"/>
-                </a:solidFill>
-                <a:latin typeface="Century Schoolbook"/>
-              </a:rPr>
-              <a:t>raise the 2 as well: 2</a:t>
-            </a:r>
-            <a:r>
-              <a:rPr sz="2400" b="0" i="0" baseline="30000">
-                <a:solidFill>
-                  <a:srgbClr val="6B6B6B"/>
-                </a:solidFill>
-                <a:latin typeface="Century Schoolbook"/>
-              </a:rPr>
-              <a:t>4</a:t>
-            </a:r>
-            <a:r>
-              <a:rPr sz="2400" b="0" i="0">
-                <a:solidFill>
-                  <a:srgbClr val="6B6B6B"/>
-                </a:solidFill>
-                <a:latin typeface="Century Schoolbook"/>
-              </a:rPr>
-              <a:t> · x</a:t>
-            </a:r>
-            <a:r>
-              <a:rPr sz="2400" b="0" i="0" baseline="30000">
-                <a:solidFill>
-                  <a:srgbClr val="6B6B6B"/>
-                </a:solidFill>
-                <a:latin typeface="Century Schoolbook"/>
-              </a:rPr>
-              <a:t>12</a:t>
-            </a:r>
-          </a:p>
-        </p:txBody>
-      </p:sp>
-      <p:sp>
-        <p:nvSpPr>
           <p:cNvPr id="11" name="TextBox 10"/>
           <p:cNvSpPr txBox="1"/>
           <p:nvPr/>
         </p:nvSpPr>
         <p:spPr>
           <a:xfrm>
-            <a:off x="4591812" y="4605528"/>
-            <a:ext cx="1920240" cy="548640"/>
-          </a:xfrm>
-          <a:prstGeom prst="rect">
-            <a:avLst/>
-          </a:prstGeom>
-          <a:noFill/>
-        </p:spPr>
-        <p:txBody>
-          <a:bodyPr wrap="square" lIns="45720" rIns="45720" tIns="18288" bIns="18288" anchor="ctr">
+            <a:off x="6600444" y="2080260"/>
+            <a:ext cx="2614168" cy="457200"/>
+          </a:xfrm>
+          <a:prstGeom prst="rect">
+            <a:avLst/>
+          </a:prstGeom>
+          <a:noFill/>
+        </p:spPr>
+        <p:txBody>
+          <a:bodyPr wrap="none" lIns="45720" rIns="45720" tIns="18288" bIns="18288" anchor="ctr">
             <a:spAutoFit/>
           </a:bodyPr>
           <a:lstStyle/>
           <a:p>
             <a:pPr algn="l"/>
             <a:r>
-              <a:rPr sz="3200" b="1" i="0">
-                <a:solidFill>
-                  <a:srgbClr val="9E1B32"/>
-                </a:solidFill>
-                <a:latin typeface="Century Schoolbook"/>
-              </a:rPr>
-              <a:t>Answer:</a:t>
+              <a:rPr sz="2600" b="0" i="0">
+                <a:solidFill>
+                  <a:srgbClr val="1A1A1A"/>
+                </a:solidFill>
+                <a:latin typeface="Century Schoolbook"/>
+              </a:rPr>
+              <a:t>  centimeters.</a:t>
+            </a:r>
+          </a:p>
+        </p:txBody>
+      </p:sp>
+      <p:sp>
+        <p:nvSpPr>
+          <p:cNvPr id="12" name="TextBox 11"/>
+          <p:cNvSpPr txBox="1"/>
+          <p:nvPr/>
+        </p:nvSpPr>
+        <p:spPr>
+          <a:xfrm>
+            <a:off x="2034539" y="2766060"/>
+            <a:ext cx="3816096" cy="457200"/>
+          </a:xfrm>
+          <a:prstGeom prst="rect">
+            <a:avLst/>
+          </a:prstGeom>
+          <a:noFill/>
+        </p:spPr>
+        <p:txBody>
+          <a:bodyPr wrap="none" lIns="45720" rIns="45720" tIns="18288" bIns="18288" anchor="ctr">
+            <a:spAutoFit/>
+          </a:bodyPr>
+          <a:lstStyle/>
+          <a:p>
+            <a:pPr algn="l"/>
+            <a:r>
+              <a:rPr sz="2600" b="0" i="0">
+                <a:solidFill>
+                  <a:srgbClr val="1A1A1A"/>
+                </a:solidFill>
+                <a:latin typeface="Century Schoolbook"/>
+              </a:rPr>
+              <a:t>Its surface area is  </a:t>
             </a:r>
           </a:p>
         </p:txBody>
       </p:sp>
       <p:pic>
         <p:nvPicPr>
-          <p:cNvPr id="12" name="Picture 11" descr="cd30d4f0938b2252.png"/>
+          <p:cNvPr id="13" name="Picture 12" descr="cf9ea632c43208c2.png"/>
           <p:cNvPicPr>
             <a:picLocks noChangeAspect="1"/>
           </p:cNvPicPr>
@@ -8210,8 +8418,208 @@
         </p:blipFill>
         <p:spPr>
           <a:xfrm>
-            <a:off x="6512051" y="4663440"/>
-            <a:ext cx="1057656" cy="432816"/>
+            <a:off x="5713476" y="2820924"/>
+            <a:ext cx="734568" cy="347472"/>
+          </a:xfrm>
+          <a:prstGeom prst="rect">
+            <a:avLst/>
+          </a:prstGeom>
+        </p:spPr>
+      </p:pic>
+      <p:sp>
+        <p:nvSpPr>
+          <p:cNvPr id="14" name="TextBox 13"/>
+          <p:cNvSpPr txBox="1"/>
+          <p:nvPr/>
+        </p:nvSpPr>
+        <p:spPr>
+          <a:xfrm>
+            <a:off x="6448044" y="2766060"/>
+            <a:ext cx="3816096" cy="457200"/>
+          </a:xfrm>
+          <a:prstGeom prst="rect">
+            <a:avLst/>
+          </a:prstGeom>
+          <a:noFill/>
+        </p:spPr>
+        <p:txBody>
+          <a:bodyPr wrap="none" lIns="45720" rIns="45720" tIns="18288" bIns="18288" anchor="ctr">
+            <a:spAutoFit/>
+          </a:bodyPr>
+          <a:lstStyle/>
+          <a:p>
+            <a:pPr algn="l"/>
+            <a:r>
+              <a:rPr sz="2600" b="0" i="0">
+                <a:solidFill>
+                  <a:srgbClr val="1A1A1A"/>
+                </a:solidFill>
+                <a:latin typeface="Century Schoolbook"/>
+              </a:rPr>
+              <a:t>  square centimeters.</a:t>
+            </a:r>
+          </a:p>
+        </p:txBody>
+      </p:sp>
+      <p:sp>
+        <p:nvSpPr>
+          <p:cNvPr id="15" name="TextBox 14"/>
+          <p:cNvSpPr txBox="1"/>
+          <p:nvPr/>
+        </p:nvSpPr>
+        <p:spPr>
+          <a:xfrm>
+            <a:off x="777240" y="3474720"/>
+            <a:ext cx="10607040" cy="465151"/>
+          </a:xfrm>
+          <a:prstGeom prst="rect">
+            <a:avLst/>
+          </a:prstGeom>
+          <a:noFill/>
+        </p:spPr>
+        <p:txBody>
+          <a:bodyPr wrap="square" lIns="45720" rIns="45720" tIns="18288" bIns="18288" anchor="t">
+            <a:spAutoFit/>
+          </a:bodyPr>
+          <a:lstStyle/>
+          <a:p>
+            <a:pPr algn="ctr"/>
+            <a:r>
+              <a:rPr sz="2600" b="0" i="0">
+                <a:solidFill>
+                  <a:srgbClr val="1A1A1A"/>
+                </a:solidFill>
+                <a:latin typeface="Century Schoolbook"/>
+              </a:rPr>
+              <a:t>Write the cube's volume as a single monomial.</a:t>
+            </a:r>
+          </a:p>
+        </p:txBody>
+      </p:sp>
+      <p:sp>
+        <p:nvSpPr>
+          <p:cNvPr id="16" name="TextBox 15"/>
+          <p:cNvSpPr txBox="1"/>
+          <p:nvPr/>
+        </p:nvSpPr>
+        <p:spPr>
+          <a:xfrm>
+            <a:off x="1828800" y="4095319"/>
+            <a:ext cx="8503920" cy="548640"/>
+          </a:xfrm>
+          <a:prstGeom prst="rect">
+            <a:avLst/>
+          </a:prstGeom>
+          <a:noFill/>
+        </p:spPr>
+        <p:txBody>
+          <a:bodyPr wrap="square" lIns="45720" rIns="45720" tIns="18288" bIns="18288" anchor="t">
+            <a:spAutoFit/>
+          </a:bodyPr>
+          <a:lstStyle/>
+          <a:p>
+            <a:pPr algn="ctr"/>
+            <a:r>
+              <a:rPr sz="2400" b="0" i="0">
+                <a:solidFill>
+                  <a:srgbClr val="6B6B6B"/>
+                </a:solidFill>
+                <a:latin typeface="Century Schoolbook"/>
+              </a:rPr>
+              <a:t>(2x</a:t>
+            </a:r>
+            <a:r>
+              <a:rPr sz="2400" b="0" i="0" baseline="30000">
+                <a:solidFill>
+                  <a:srgbClr val="6B6B6B"/>
+                </a:solidFill>
+                <a:latin typeface="Century Schoolbook"/>
+              </a:rPr>
+              <a:t>3</a:t>
+            </a:r>
+            <a:r>
+              <a:rPr sz="2400" b="0" i="0">
+                <a:solidFill>
+                  <a:srgbClr val="6B6B6B"/>
+                </a:solidFill>
+                <a:latin typeface="Century Schoolbook"/>
+              </a:rPr>
+              <a:t>)</a:t>
+            </a:r>
+            <a:r>
+              <a:rPr sz="2400" b="0" i="0" baseline="30000">
+                <a:solidFill>
+                  <a:srgbClr val="6B6B6B"/>
+                </a:solidFill>
+                <a:latin typeface="Century Schoolbook"/>
+              </a:rPr>
+              <a:t>3</a:t>
+            </a:r>
+            <a:r>
+              <a:rPr sz="2400" b="0" i="0">
+                <a:solidFill>
+                  <a:srgbClr val="6B6B6B"/>
+                </a:solidFill>
+                <a:latin typeface="Century Schoolbook"/>
+              </a:rPr>
+              <a:t>: raise the 2 as well</a:t>
+            </a:r>
+          </a:p>
+        </p:txBody>
+      </p:sp>
+      <p:sp>
+        <p:nvSpPr>
+          <p:cNvPr id="17" name="TextBox 16"/>
+          <p:cNvSpPr txBox="1"/>
+          <p:nvPr/>
+        </p:nvSpPr>
+        <p:spPr>
+          <a:xfrm>
+            <a:off x="4797551" y="4768927"/>
+            <a:ext cx="1920240" cy="548640"/>
+          </a:xfrm>
+          <a:prstGeom prst="rect">
+            <a:avLst/>
+          </a:prstGeom>
+          <a:noFill/>
+        </p:spPr>
+        <p:txBody>
+          <a:bodyPr wrap="square" lIns="45720" rIns="45720" tIns="18288" bIns="18288" anchor="ctr">
+            <a:spAutoFit/>
+          </a:bodyPr>
+          <a:lstStyle/>
+          <a:p>
+            <a:pPr algn="l"/>
+            <a:r>
+              <a:rPr sz="3200" b="1" i="0">
+                <a:solidFill>
+                  <a:srgbClr val="9E1B32"/>
+                </a:solidFill>
+                <a:latin typeface="Century Schoolbook"/>
+              </a:rPr>
+              <a:t>Answer:</a:t>
+            </a:r>
+          </a:p>
+        </p:txBody>
+      </p:sp>
+      <p:pic>
+        <p:nvPicPr>
+          <p:cNvPr id="18" name="Picture 17" descr="b5d97e94079cb0b8.png"/>
+          <p:cNvPicPr>
+            <a:picLocks noChangeAspect="1"/>
+          </p:cNvPicPr>
+          <p:nvPr/>
+        </p:nvPicPr>
+        <p:blipFill>
+          <a:blip r:embed="rId4"/>
+          <a:stretch>
+            <a:fillRect/>
+          </a:stretch>
+        </p:blipFill>
+        <p:spPr>
+          <a:xfrm>
+            <a:off x="6717791" y="4826839"/>
+            <a:ext cx="646176" cy="432816"/>
           </a:xfrm>
           <a:prstGeom prst="rect">
             <a:avLst/>
@@ -14914,7 +15322,7 @@
                 </a:solidFill>
                 <a:latin typeface="Century Schoolbook"/>
               </a:rPr>
-              <a:t>IXL</a:t>
+              <a:t>Independent Set</a:t>
             </a:r>
           </a:p>
         </p:txBody>
@@ -15019,7 +15427,7 @@
                 </a:solidFill>
                 <a:latin typeface="Century Schoolbook"/>
               </a:rPr>
-              <a:t>Last five minutes.</a:t>
+              <a:t>Six questions. On your own, in silence.</a:t>
             </a:r>
           </a:p>
         </p:txBody>
@@ -15137,6 +15545,479 @@
         </p:nvSpPr>
         <p:spPr>
           <a:xfrm>
+            <a:off x="960120" y="2011680"/>
+            <a:ext cx="548640" cy="356616"/>
+          </a:xfrm>
+          <a:prstGeom prst="rect">
+            <a:avLst/>
+          </a:prstGeom>
+          <a:noFill/>
+        </p:spPr>
+        <p:txBody>
+          <a:bodyPr wrap="square" lIns="45720" rIns="45720" tIns="18288" bIns="18288" anchor="t">
+            <a:spAutoFit/>
+          </a:bodyPr>
+          <a:lstStyle/>
+          <a:p>
+            <a:pPr algn="l"/>
+            <a:r>
+              <a:rPr sz="2100" b="1" i="0">
+                <a:solidFill>
+                  <a:srgbClr val="0B5394"/>
+                </a:solidFill>
+                <a:latin typeface="Century Schoolbook"/>
+              </a:rPr>
+              <a:t>1.</a:t>
+            </a:r>
+          </a:p>
+        </p:txBody>
+      </p:sp>
+      <p:sp>
+        <p:nvSpPr>
+          <p:cNvPr id="10" name="TextBox 9"/>
+          <p:cNvSpPr txBox="1"/>
+          <p:nvPr/>
+        </p:nvSpPr>
+        <p:spPr>
+          <a:xfrm>
+            <a:off x="1554480" y="2011680"/>
+            <a:ext cx="9829800" cy="411480"/>
+          </a:xfrm>
+          <a:prstGeom prst="rect">
+            <a:avLst/>
+          </a:prstGeom>
+          <a:noFill/>
+        </p:spPr>
+        <p:txBody>
+          <a:bodyPr wrap="square" lIns="45720" rIns="45720" tIns="18288" bIns="18288" anchor="t">
+            <a:spAutoFit/>
+          </a:bodyPr>
+          <a:lstStyle/>
+          <a:p>
+            <a:pPr algn="l"/>
+            <a:r>
+              <a:rPr sz="2100" b="0" i="0">
+                <a:solidFill>
+                  <a:srgbClr val="1A1A1A"/>
+                </a:solidFill>
+                <a:latin typeface="Century Schoolbook"/>
+              </a:rPr>
+              <a:t>Six questions. Work down the page.</a:t>
+            </a:r>
+          </a:p>
+        </p:txBody>
+      </p:sp>
+      <p:sp>
+        <p:nvSpPr>
+          <p:cNvPr id="11" name="TextBox 10"/>
+          <p:cNvSpPr txBox="1"/>
+          <p:nvPr/>
+        </p:nvSpPr>
+        <p:spPr>
+          <a:xfrm>
+            <a:off x="960120" y="2551176"/>
+            <a:ext cx="548640" cy="356616"/>
+          </a:xfrm>
+          <a:prstGeom prst="rect">
+            <a:avLst/>
+          </a:prstGeom>
+          <a:noFill/>
+        </p:spPr>
+        <p:txBody>
+          <a:bodyPr wrap="square" lIns="45720" rIns="45720" tIns="18288" bIns="18288" anchor="t">
+            <a:spAutoFit/>
+          </a:bodyPr>
+          <a:lstStyle/>
+          <a:p>
+            <a:pPr algn="l"/>
+            <a:r>
+              <a:rPr sz="2100" b="1" i="0">
+                <a:solidFill>
+                  <a:srgbClr val="0B5394"/>
+                </a:solidFill>
+                <a:latin typeface="Century Schoolbook"/>
+              </a:rPr>
+              <a:t>2.</a:t>
+            </a:r>
+          </a:p>
+        </p:txBody>
+      </p:sp>
+      <p:sp>
+        <p:nvSpPr>
+          <p:cNvPr id="12" name="TextBox 11"/>
+          <p:cNvSpPr txBox="1"/>
+          <p:nvPr/>
+        </p:nvSpPr>
+        <p:spPr>
+          <a:xfrm>
+            <a:off x="1554480" y="2551176"/>
+            <a:ext cx="9829800" cy="411480"/>
+          </a:xfrm>
+          <a:prstGeom prst="rect">
+            <a:avLst/>
+          </a:prstGeom>
+          <a:noFill/>
+        </p:spPr>
+        <p:txBody>
+          <a:bodyPr wrap="square" lIns="45720" rIns="45720" tIns="18288" bIns="18288" anchor="t">
+            <a:spAutoFit/>
+          </a:bodyPr>
+          <a:lstStyle/>
+          <a:p>
+            <a:pPr algn="l"/>
+            <a:r>
+              <a:rPr sz="2100" b="0" i="0">
+                <a:solidFill>
+                  <a:srgbClr val="1A1A1A"/>
+                </a:solidFill>
+                <a:latin typeface="Century Schoolbook"/>
+              </a:rPr>
+              <a:t>Show the step that does the work, not just the answer.</a:t>
+            </a:r>
+          </a:p>
+        </p:txBody>
+      </p:sp>
+      <p:sp>
+        <p:nvSpPr>
+          <p:cNvPr id="13" name="TextBox 12"/>
+          <p:cNvSpPr txBox="1"/>
+          <p:nvPr/>
+        </p:nvSpPr>
+        <p:spPr>
+          <a:xfrm>
+            <a:off x="960120" y="3090672"/>
+            <a:ext cx="548640" cy="356616"/>
+          </a:xfrm>
+          <a:prstGeom prst="rect">
+            <a:avLst/>
+          </a:prstGeom>
+          <a:noFill/>
+        </p:spPr>
+        <p:txBody>
+          <a:bodyPr wrap="square" lIns="45720" rIns="45720" tIns="18288" bIns="18288" anchor="t">
+            <a:spAutoFit/>
+          </a:bodyPr>
+          <a:lstStyle/>
+          <a:p>
+            <a:pPr algn="l"/>
+            <a:r>
+              <a:rPr sz="2100" b="1" i="0">
+                <a:solidFill>
+                  <a:srgbClr val="0B5394"/>
+                </a:solidFill>
+                <a:latin typeface="Century Schoolbook"/>
+              </a:rPr>
+              <a:t>3.</a:t>
+            </a:r>
+          </a:p>
+        </p:txBody>
+      </p:sp>
+      <p:sp>
+        <p:nvSpPr>
+          <p:cNvPr id="14" name="TextBox 13"/>
+          <p:cNvSpPr txBox="1"/>
+          <p:nvPr/>
+        </p:nvSpPr>
+        <p:spPr>
+          <a:xfrm>
+            <a:off x="1554480" y="3090672"/>
+            <a:ext cx="9829800" cy="411480"/>
+          </a:xfrm>
+          <a:prstGeom prst="rect">
+            <a:avLst/>
+          </a:prstGeom>
+          <a:noFill/>
+        </p:spPr>
+        <p:txBody>
+          <a:bodyPr wrap="square" lIns="45720" rIns="45720" tIns="18288" bIns="18288" anchor="t">
+            <a:spAutoFit/>
+          </a:bodyPr>
+          <a:lstStyle/>
+          <a:p>
+            <a:pPr algn="l"/>
+            <a:r>
+              <a:rPr sz="2100" b="0" i="0">
+                <a:solidFill>
+                  <a:srgbClr val="1A1A1A"/>
+                </a:solidFill>
+                <a:latin typeface="Century Schoolbook"/>
+              </a:rPr>
+              <a:t>Silence until the six minutes are up.</a:t>
+            </a:r>
+          </a:p>
+        </p:txBody>
+      </p:sp>
+    </p:spTree>
+  </p:cSld>
+  <p:clrMapOvr>
+    <a:masterClrMapping/>
+  </p:clrMapOvr>
+</p:sld>
+</file>
+
+<file path=ppt/slides/slide34.xml><?xml version="1.0" encoding="utf-8"?>
+<p:sld xmlns:a="http://schemas.openxmlformats.org/drawingml/2006/main" xmlns:p="http://schemas.openxmlformats.org/presentationml/2006/main" xmlns:r="http://schemas.openxmlformats.org/officeDocument/2006/relationships">
+  <p:cSld>
+    <p:spTree>
+      <p:nvGrpSpPr>
+        <p:cNvPr id="1" name=""/>
+        <p:cNvGrpSpPr/>
+        <p:nvPr/>
+      </p:nvGrpSpPr>
+      <p:grpSpPr/>
+      <p:sp>
+        <p:nvSpPr>
+          <p:cNvPr id="2" name="TextBox 1"/>
+          <p:cNvSpPr txBox="1"/>
+          <p:nvPr/>
+        </p:nvSpPr>
+        <p:spPr>
+          <a:xfrm>
+            <a:off x="777240" y="365760"/>
+            <a:ext cx="10607040" cy="640080"/>
+          </a:xfrm>
+          <a:prstGeom prst="rect">
+            <a:avLst/>
+          </a:prstGeom>
+          <a:noFill/>
+        </p:spPr>
+        <p:txBody>
+          <a:bodyPr wrap="square" lIns="45720" rIns="45720" tIns="18288" bIns="18288" anchor="t">
+            <a:spAutoFit/>
+          </a:bodyPr>
+          <a:lstStyle/>
+          <a:p>
+            <a:pPr algn="l"/>
+            <a:r>
+              <a:rPr sz="3600" b="1" i="0">
+                <a:solidFill>
+                  <a:srgbClr val="1A1A1A"/>
+                </a:solidFill>
+                <a:latin typeface="Century Schoolbook"/>
+              </a:rPr>
+              <a:t>IXL</a:t>
+            </a:r>
+          </a:p>
+        </p:txBody>
+      </p:sp>
+      <p:cxnSp>
+        <p:nvCxnSpPr>
+          <p:cNvPr id="3" name="Connector 2"/>
+          <p:cNvCxnSpPr/>
+          <p:nvPr/>
+        </p:nvCxnSpPr>
+        <p:spPr>
+          <a:xfrm>
+            <a:off x="777240" y="1097280"/>
+            <a:ext cx="10607040" cy="0"/>
+          </a:xfrm>
+          <a:prstGeom prst="line">
+            <a:avLst/>
+          </a:prstGeom>
+          <a:ln w="19050">
+            <a:solidFill>
+              <a:srgbClr val="1A1A1A"/>
+            </a:solidFill>
+          </a:ln>
+        </p:spPr>
+        <p:style>
+          <a:lnRef idx="2">
+            <a:schemeClr val="accent1"/>
+          </a:lnRef>
+          <a:fillRef idx="0">
+            <a:schemeClr val="accent1"/>
+          </a:fillRef>
+          <a:effectRef idx="1">
+            <a:schemeClr val="accent1"/>
+          </a:effectRef>
+          <a:fontRef idx="minor">
+            <a:schemeClr val="tx1"/>
+          </a:fontRef>
+        </p:style>
+      </p:cxnSp>
+      <p:cxnSp>
+        <p:nvCxnSpPr>
+          <p:cNvPr id="4" name="Connector 3"/>
+          <p:cNvCxnSpPr/>
+          <p:nvPr/>
+        </p:nvCxnSpPr>
+        <p:spPr>
+          <a:xfrm>
+            <a:off x="777240" y="1179576"/>
+            <a:ext cx="10607040" cy="0"/>
+          </a:xfrm>
+          <a:prstGeom prst="line">
+            <a:avLst/>
+          </a:prstGeom>
+          <a:ln w="9525">
+            <a:solidFill>
+              <a:srgbClr val="1A1A1A"/>
+            </a:solidFill>
+          </a:ln>
+        </p:spPr>
+        <p:style>
+          <a:lnRef idx="2">
+            <a:schemeClr val="accent1"/>
+          </a:lnRef>
+          <a:fillRef idx="0">
+            <a:schemeClr val="accent1"/>
+          </a:fillRef>
+          <a:effectRef idx="1">
+            <a:schemeClr val="accent1"/>
+          </a:effectRef>
+          <a:fontRef idx="minor">
+            <a:schemeClr val="tx1"/>
+          </a:fontRef>
+        </p:style>
+      </p:cxnSp>
+      <p:sp>
+        <p:nvSpPr>
+          <p:cNvPr id="5" name="TextBox 4"/>
+          <p:cNvSpPr txBox="1"/>
+          <p:nvPr/>
+        </p:nvSpPr>
+        <p:spPr>
+          <a:xfrm>
+            <a:off x="777240" y="1261872"/>
+            <a:ext cx="10607040" cy="310896"/>
+          </a:xfrm>
+          <a:prstGeom prst="rect">
+            <a:avLst/>
+          </a:prstGeom>
+          <a:noFill/>
+        </p:spPr>
+        <p:txBody>
+          <a:bodyPr wrap="square" lIns="45720" rIns="45720" tIns="18288" bIns="18288" anchor="t">
+            <a:spAutoFit/>
+          </a:bodyPr>
+          <a:lstStyle/>
+          <a:p>
+            <a:pPr algn="l"/>
+            <a:r>
+              <a:rPr sz="1700" b="0" i="1">
+                <a:solidFill>
+                  <a:srgbClr val="6B6B6B"/>
+                </a:solidFill>
+                <a:latin typeface="Century Schoolbook"/>
+              </a:rPr>
+              <a:t>Last five minutes.</a:t>
+            </a:r>
+          </a:p>
+        </p:txBody>
+      </p:sp>
+      <p:cxnSp>
+        <p:nvCxnSpPr>
+          <p:cNvPr id="6" name="Connector 5"/>
+          <p:cNvCxnSpPr/>
+          <p:nvPr/>
+        </p:nvCxnSpPr>
+        <p:spPr>
+          <a:xfrm>
+            <a:off x="777240" y="6199632"/>
+            <a:ext cx="10607040" cy="0"/>
+          </a:xfrm>
+          <a:prstGeom prst="line">
+            <a:avLst/>
+          </a:prstGeom>
+          <a:ln w="9525">
+            <a:solidFill>
+              <a:srgbClr val="6B6B6B"/>
+            </a:solidFill>
+          </a:ln>
+        </p:spPr>
+        <p:style>
+          <a:lnRef idx="2">
+            <a:schemeClr val="accent1"/>
+          </a:lnRef>
+          <a:fillRef idx="0">
+            <a:schemeClr val="accent1"/>
+          </a:fillRef>
+          <a:effectRef idx="1">
+            <a:schemeClr val="accent1"/>
+          </a:effectRef>
+          <a:fontRef idx="minor">
+            <a:schemeClr val="tx1"/>
+          </a:fontRef>
+        </p:style>
+      </p:cxnSp>
+      <p:sp>
+        <p:nvSpPr>
+          <p:cNvPr id="7" name="TextBox 6"/>
+          <p:cNvSpPr txBox="1"/>
+          <p:nvPr/>
+        </p:nvSpPr>
+        <p:spPr>
+          <a:xfrm>
+            <a:off x="777240" y="6272784"/>
+            <a:ext cx="9692640" cy="274320"/>
+          </a:xfrm>
+          <a:prstGeom prst="rect">
+            <a:avLst/>
+          </a:prstGeom>
+          <a:noFill/>
+        </p:spPr>
+        <p:txBody>
+          <a:bodyPr wrap="square" lIns="45720" rIns="45720" tIns="18288" bIns="18288" anchor="t">
+            <a:spAutoFit/>
+          </a:bodyPr>
+          <a:lstStyle/>
+          <a:p>
+            <a:pPr algn="l"/>
+            <a:r>
+              <a:rPr sz="1100" b="0" i="1">
+                <a:solidFill>
+                  <a:srgbClr val="6B6B6B"/>
+                </a:solidFill>
+                <a:latin typeface="Century Schoolbook"/>
+              </a:rPr>
+              <a:t>Grade 7 Accelerated · Unit 3 · Thread A · Day 1 — Exponent Laws with Variable Bases</a:t>
+            </a:r>
+          </a:p>
+        </p:txBody>
+      </p:sp>
+      <p:sp>
+        <p:nvSpPr>
+          <p:cNvPr id="8" name="TextBox 7"/>
+          <p:cNvSpPr txBox="1"/>
+          <p:nvPr/>
+        </p:nvSpPr>
+        <p:spPr>
+          <a:xfrm>
+            <a:off x="10744200" y="6272784"/>
+            <a:ext cx="640080" cy="274320"/>
+          </a:xfrm>
+          <a:prstGeom prst="rect">
+            <a:avLst/>
+          </a:prstGeom>
+          <a:noFill/>
+        </p:spPr>
+        <p:txBody>
+          <a:bodyPr wrap="square" lIns="45720" rIns="45720" tIns="18288" bIns="18288" anchor="t">
+            <a:spAutoFit/>
+          </a:bodyPr>
+          <a:lstStyle/>
+          <a:p>
+            <a:pPr algn="r"/>
+            <a:r>
+              <a:rPr sz="1100" b="0" i="0">
+                <a:solidFill>
+                  <a:srgbClr val="6B6B6B"/>
+                </a:solidFill>
+                <a:latin typeface="Century Schoolbook"/>
+              </a:rPr>
+              <a:t>34</a:t>
+            </a:r>
+          </a:p>
+        </p:txBody>
+      </p:sp>
+      <p:sp>
+        <p:nvSpPr>
+          <p:cNvPr id="9" name="TextBox 8"/>
+          <p:cNvSpPr txBox="1"/>
+          <p:nvPr/>
+        </p:nvSpPr>
+        <p:spPr>
+          <a:xfrm>
             <a:off x="960120" y="1828800"/>
             <a:ext cx="548640" cy="356616"/>
           </a:xfrm>
@@ -15334,7 +16215,7 @@
                 </a:solidFill>
                 <a:latin typeface="Century Schoolbook"/>
               </a:rPr>
-              <a:t>Stop at a SmartScore of 67 on each skill. Whatever you do not finish is tonight's practice.</a:t>
+              <a:t>Every skill listed is required, to a SmartScore of 67. Due at the start of the next class.</a:t>
             </a:r>
           </a:p>
         </p:txBody>
@@ -15369,7 +16250,7 @@
                 </a:solidFill>
                 <a:latin typeface="Century Schoolbook"/>
               </a:rPr>
-              <a:t>Today's skills</a:t>
+              <a:t>Today's skills — all required</a:t>
             </a:r>
           </a:p>
         </p:txBody>

--- a/a7/build/out/u3/A7 3.T1  Slides.pptx
+++ b/a7/build/out/u3/A7 3.T1  Slides.pptx
@@ -4264,7 +4264,7 @@
       </p:sp>
       <p:pic>
         <p:nvPicPr>
-          <p:cNvPr id="9" name="Picture 8" descr="ab16b599b13e6cdf.png"/>
+          <p:cNvPr id="9" name="Picture 8" descr="b9dec83acdd34052.png"/>
           <p:cNvPicPr>
             <a:picLocks noChangeAspect="1"/>
           </p:cNvPicPr>
@@ -4278,8 +4278,8 @@
         </p:blipFill>
         <p:spPr>
           <a:xfrm>
-            <a:off x="5615939" y="2103120"/>
-            <a:ext cx="929640" cy="658368"/>
+            <a:off x="5417820" y="2103120"/>
+            <a:ext cx="1325880" cy="890016"/>
           </a:xfrm>
           <a:prstGeom prst="rect">
             <a:avLst/>
@@ -4294,7 +4294,7 @@
         </p:nvSpPr>
         <p:spPr>
           <a:xfrm>
-            <a:off x="777240" y="3264408"/>
+            <a:off x="777240" y="3496056"/>
             <a:ext cx="10607040" cy="429370"/>
           </a:xfrm>
           <a:prstGeom prst="rect">
@@ -4645,7 +4645,7 @@
       </p:sp>
       <p:pic>
         <p:nvPicPr>
-          <p:cNvPr id="11" name="Picture 10" descr="a6abded2336caf45.png"/>
+          <p:cNvPr id="11" name="Picture 10" descr="768f4c680dae22ed.png"/>
           <p:cNvPicPr>
             <a:picLocks noChangeAspect="1"/>
           </p:cNvPicPr>
@@ -4660,7 +4660,7 @@
         <p:spPr>
           <a:xfrm>
             <a:off x="1828800" y="2609087"/>
-            <a:ext cx="5157216" cy="609600"/>
+            <a:ext cx="5541264" cy="819912"/>
           </a:xfrm>
           <a:prstGeom prst="rect">
             <a:avLst/>
@@ -4675,8 +4675,8 @@
         </p:nvSpPr>
         <p:spPr>
           <a:xfrm>
-            <a:off x="7443216" y="2685288"/>
-            <a:ext cx="3941063" cy="502920"/>
+            <a:off x="7827263" y="2790443"/>
+            <a:ext cx="3557016" cy="502920"/>
           </a:xfrm>
           <a:prstGeom prst="rect">
             <a:avLst/>
@@ -5029,7 +5029,7 @@
       </p:sp>
       <p:pic>
         <p:nvPicPr>
-          <p:cNvPr id="9" name="Picture 8" descr="6060cb0885c65d76.png"/>
+          <p:cNvPr id="9" name="Picture 8" descr="c61e723e73851ee8.png"/>
           <p:cNvPicPr>
             <a:picLocks noChangeAspect="1"/>
           </p:cNvPicPr>
@@ -5043,8 +5043,8 @@
         </p:blipFill>
         <p:spPr>
           <a:xfrm>
-            <a:off x="5626607" y="2194560"/>
-            <a:ext cx="908304" cy="899160"/>
+            <a:off x="5434583" y="2194560"/>
+            <a:ext cx="1292352" cy="1216152"/>
           </a:xfrm>
           <a:prstGeom prst="rect">
             <a:avLst/>
@@ -5316,7 +5316,7 @@
       </p:sp>
       <p:pic>
         <p:nvPicPr>
-          <p:cNvPr id="9" name="Picture 8" descr="6060cb0885c65d76.png"/>
+          <p:cNvPr id="9" name="Picture 8" descr="c61e723e73851ee8.png"/>
           <p:cNvPicPr>
             <a:picLocks noChangeAspect="1"/>
           </p:cNvPicPr>
@@ -5330,8 +5330,8 @@
         </p:blipFill>
         <p:spPr>
           <a:xfrm>
-            <a:off x="5626607" y="2194560"/>
-            <a:ext cx="908304" cy="899160"/>
+            <a:off x="5434583" y="2194560"/>
+            <a:ext cx="1292352" cy="1216152"/>
           </a:xfrm>
           <a:prstGeom prst="rect">
             <a:avLst/>
@@ -5346,7 +5346,7 @@
         </p:nvSpPr>
         <p:spPr>
           <a:xfrm>
-            <a:off x="777240" y="3413760"/>
+            <a:off x="777240" y="3730752"/>
             <a:ext cx="10607040" cy="429370"/>
           </a:xfrm>
           <a:prstGeom prst="rect">
@@ -7191,8 +7191,8 @@
         </p:nvSpPr>
         <p:spPr>
           <a:xfrm>
-            <a:off x="3084067" y="2171700"/>
-            <a:ext cx="3129280" cy="457200"/>
+            <a:off x="3256587" y="2171700"/>
+            <a:ext cx="2996052" cy="457200"/>
           </a:xfrm>
           <a:prstGeom prst="rect">
             <a:avLst/>
@@ -7201,7 +7201,7 @@
         </p:spPr>
         <p:txBody>
           <a:bodyPr wrap="none" lIns="45720" rIns="45720" tIns="18288" bIns="18288" anchor="ctr">
-            <a:spAutoFit/>
+            <a:noAutofit/>
           </a:bodyPr>
           <a:lstStyle/>
           <a:p>
@@ -7234,7 +7234,7 @@
         </p:blipFill>
         <p:spPr>
           <a:xfrm>
-            <a:off x="6076188" y="2228088"/>
+            <a:off x="6115479" y="2228088"/>
             <a:ext cx="524256" cy="344424"/>
           </a:xfrm>
           <a:prstGeom prst="rect">
@@ -7250,8 +7250,8 @@
         </p:nvSpPr>
         <p:spPr>
           <a:xfrm>
-            <a:off x="6600444" y="2171700"/>
-            <a:ext cx="2614168" cy="457200"/>
+            <a:off x="6639735" y="2171700"/>
+            <a:ext cx="2402356" cy="457200"/>
           </a:xfrm>
           <a:prstGeom prst="rect">
             <a:avLst/>
@@ -7260,7 +7260,7 @@
         </p:spPr>
         <p:txBody>
           <a:bodyPr wrap="none" lIns="45720" rIns="45720" tIns="18288" bIns="18288" anchor="ctr">
-            <a:spAutoFit/>
+            <a:noAutofit/>
           </a:bodyPr>
           <a:lstStyle/>
           <a:p>
@@ -7285,8 +7285,8 @@
         </p:nvSpPr>
         <p:spPr>
           <a:xfrm>
-            <a:off x="2034539" y="2857500"/>
-            <a:ext cx="3816096" cy="457200"/>
+            <a:off x="2402791" y="2857500"/>
+            <a:ext cx="3303995" cy="457200"/>
           </a:xfrm>
           <a:prstGeom prst="rect">
             <a:avLst/>
@@ -7295,7 +7295,7 @@
         </p:spPr>
         <p:txBody>
           <a:bodyPr wrap="none" lIns="45720" rIns="45720" tIns="18288" bIns="18288" anchor="ctr">
-            <a:spAutoFit/>
+            <a:noAutofit/>
           </a:bodyPr>
           <a:lstStyle/>
           <a:p>
@@ -7328,7 +7328,7 @@
         </p:blipFill>
         <p:spPr>
           <a:xfrm>
-            <a:off x="5713476" y="2912364"/>
+            <a:off x="5569627" y="2912364"/>
             <a:ext cx="734568" cy="347472"/>
           </a:xfrm>
           <a:prstGeom prst="rect">
@@ -7344,8 +7344,8 @@
         </p:nvSpPr>
         <p:spPr>
           <a:xfrm>
-            <a:off x="6448044" y="2857500"/>
-            <a:ext cx="3816096" cy="457200"/>
+            <a:off x="6304195" y="2857500"/>
+            <a:ext cx="3591692" cy="457200"/>
           </a:xfrm>
           <a:prstGeom prst="rect">
             <a:avLst/>
@@ -7354,7 +7354,7 @@
         </p:spPr>
         <p:txBody>
           <a:bodyPr wrap="none" lIns="45720" rIns="45720" tIns="18288" bIns="18288" anchor="ctr">
-            <a:spAutoFit/>
+            <a:noAutofit/>
           </a:bodyPr>
           <a:lstStyle/>
           <a:p>
@@ -7748,7 +7748,7 @@
         <p:spPr>
           <a:xfrm>
             <a:off x="1874519" y="1760220"/>
-            <a:ext cx="3551936" cy="457200"/>
+            <a:ext cx="3058734" cy="457200"/>
           </a:xfrm>
           <a:prstGeom prst="rect">
             <a:avLst/>
@@ -7757,7 +7757,7 @@
         </p:spPr>
         <p:txBody>
           <a:bodyPr wrap="none" lIns="45720" rIns="45720" tIns="18288" bIns="18288" anchor="ctr">
-            <a:spAutoFit/>
+            <a:noAutofit/>
           </a:bodyPr>
           <a:lstStyle/>
           <a:p>
@@ -7790,7 +7790,7 @@
         </p:blipFill>
         <p:spPr>
           <a:xfrm>
-            <a:off x="5289296" y="1821180"/>
+            <a:off x="4796094" y="1821180"/>
             <a:ext cx="1267968" cy="335280"/>
           </a:xfrm>
           <a:prstGeom prst="rect">
@@ -7806,8 +7806,8 @@
         </p:nvSpPr>
         <p:spPr>
           <a:xfrm>
-            <a:off x="1874519" y="2414016"/>
-            <a:ext cx="4159504" cy="457200"/>
+            <a:off x="1874519" y="2499360"/>
+            <a:ext cx="3704805" cy="457200"/>
           </a:xfrm>
           <a:prstGeom prst="rect">
             <a:avLst/>
@@ -7816,7 +7816,7 @@
         </p:spPr>
         <p:txBody>
           <a:bodyPr wrap="none" lIns="45720" rIns="45720" tIns="18288" bIns="18288" anchor="ctr">
-            <a:spAutoFit/>
+            <a:noAutofit/>
           </a:bodyPr>
           <a:lstStyle/>
           <a:p>
@@ -7835,7 +7835,7 @@
       </p:sp>
       <p:pic>
         <p:nvPicPr>
-          <p:cNvPr id="12" name="Picture 11" descr="0e4bbceb5e115730.png"/>
+          <p:cNvPr id="12" name="Picture 11" descr="9d90cf2f49ecc87f.png"/>
           <p:cNvPicPr>
             <a:picLocks noChangeAspect="1"/>
           </p:cNvPicPr>
@@ -7849,8 +7849,8 @@
         </p:blipFill>
         <p:spPr>
           <a:xfrm>
-            <a:off x="5896864" y="2395728"/>
-            <a:ext cx="216408" cy="493776"/>
+            <a:off x="5442165" y="2395728"/>
+            <a:ext cx="304800" cy="664464"/>
           </a:xfrm>
           <a:prstGeom prst="rect">
             <a:avLst/>
@@ -7865,8 +7865,8 @@
         </p:nvSpPr>
         <p:spPr>
           <a:xfrm>
-            <a:off x="1874519" y="3067812"/>
-            <a:ext cx="969771" cy="457200"/>
+            <a:off x="1874519" y="3238500"/>
+            <a:ext cx="726811" cy="457200"/>
           </a:xfrm>
           <a:prstGeom prst="rect">
             <a:avLst/>
@@ -7875,7 +7875,7 @@
         </p:spPr>
         <p:txBody>
           <a:bodyPr wrap="none" lIns="45720" rIns="45720" tIns="18288" bIns="18288" anchor="ctr">
-            <a:spAutoFit/>
+            <a:noAutofit/>
           </a:bodyPr>
           <a:lstStyle/>
           <a:p>
@@ -7908,7 +7908,7 @@
         </p:blipFill>
         <p:spPr>
           <a:xfrm>
-            <a:off x="2707132" y="3092196"/>
+            <a:off x="2464171" y="3262884"/>
             <a:ext cx="688848" cy="408432"/>
           </a:xfrm>
           <a:prstGeom prst="rect">
@@ -7924,8 +7924,8 @@
         </p:nvSpPr>
         <p:spPr>
           <a:xfrm>
-            <a:off x="3395980" y="3067812"/>
-            <a:ext cx="5678424" cy="457200"/>
+            <a:off x="3153019" y="3238500"/>
+            <a:ext cx="5733570" cy="457200"/>
           </a:xfrm>
           <a:prstGeom prst="rect">
             <a:avLst/>
@@ -7934,7 +7934,7 @@
         </p:spPr>
         <p:txBody>
           <a:bodyPr wrap="none" lIns="45720" rIns="45720" tIns="18288" bIns="18288" anchor="ctr">
-            <a:spAutoFit/>
+            <a:noAutofit/>
           </a:bodyPr>
           <a:lstStyle/>
           <a:p>
@@ -7959,8 +7959,8 @@
         </p:nvSpPr>
         <p:spPr>
           <a:xfrm>
-            <a:off x="1874519" y="3680460"/>
-            <a:ext cx="4767072" cy="457200"/>
+            <a:off x="1874519" y="3851147"/>
+            <a:ext cx="4347668" cy="457200"/>
           </a:xfrm>
           <a:prstGeom prst="rect">
             <a:avLst/>
@@ -7969,7 +7969,7 @@
         </p:spPr>
         <p:txBody>
           <a:bodyPr wrap="none" lIns="45720" rIns="45720" tIns="18288" bIns="18288" anchor="ctr">
-            <a:spAutoFit/>
+            <a:noAutofit/>
           </a:bodyPr>
           <a:lstStyle/>
           <a:p>
@@ -8002,7 +8002,7 @@
         </p:blipFill>
         <p:spPr>
           <a:xfrm>
-            <a:off x="6504432" y="3802380"/>
+            <a:off x="6085028" y="3973068"/>
             <a:ext cx="1499616" cy="213360"/>
           </a:xfrm>
           <a:prstGeom prst="rect">
@@ -8281,8 +8281,8 @@
         </p:nvSpPr>
         <p:spPr>
           <a:xfrm>
-            <a:off x="3084067" y="2080260"/>
-            <a:ext cx="3129280" cy="457200"/>
+            <a:off x="3256587" y="2080260"/>
+            <a:ext cx="2996052" cy="457200"/>
           </a:xfrm>
           <a:prstGeom prst="rect">
             <a:avLst/>
@@ -8291,7 +8291,7 @@
         </p:spPr>
         <p:txBody>
           <a:bodyPr wrap="none" lIns="45720" rIns="45720" tIns="18288" bIns="18288" anchor="ctr">
-            <a:spAutoFit/>
+            <a:noAutofit/>
           </a:bodyPr>
           <a:lstStyle/>
           <a:p>
@@ -8324,7 +8324,7 @@
         </p:blipFill>
         <p:spPr>
           <a:xfrm>
-            <a:off x="6076188" y="2136648"/>
+            <a:off x="6115479" y="2136648"/>
             <a:ext cx="524256" cy="344424"/>
           </a:xfrm>
           <a:prstGeom prst="rect">
@@ -8340,8 +8340,8 @@
         </p:nvSpPr>
         <p:spPr>
           <a:xfrm>
-            <a:off x="6600444" y="2080260"/>
-            <a:ext cx="2614168" cy="457200"/>
+            <a:off x="6639735" y="2080260"/>
+            <a:ext cx="2402356" cy="457200"/>
           </a:xfrm>
           <a:prstGeom prst="rect">
             <a:avLst/>
@@ -8350,7 +8350,7 @@
         </p:spPr>
         <p:txBody>
           <a:bodyPr wrap="none" lIns="45720" rIns="45720" tIns="18288" bIns="18288" anchor="ctr">
-            <a:spAutoFit/>
+            <a:noAutofit/>
           </a:bodyPr>
           <a:lstStyle/>
           <a:p>
@@ -8375,8 +8375,8 @@
         </p:nvSpPr>
         <p:spPr>
           <a:xfrm>
-            <a:off x="2034539" y="2766060"/>
-            <a:ext cx="3816096" cy="457200"/>
+            <a:off x="2402791" y="2766060"/>
+            <a:ext cx="3303995" cy="457200"/>
           </a:xfrm>
           <a:prstGeom prst="rect">
             <a:avLst/>
@@ -8385,7 +8385,7 @@
         </p:spPr>
         <p:txBody>
           <a:bodyPr wrap="none" lIns="45720" rIns="45720" tIns="18288" bIns="18288" anchor="ctr">
-            <a:spAutoFit/>
+            <a:noAutofit/>
           </a:bodyPr>
           <a:lstStyle/>
           <a:p>
@@ -8418,7 +8418,7 @@
         </p:blipFill>
         <p:spPr>
           <a:xfrm>
-            <a:off x="5713476" y="2820924"/>
+            <a:off x="5569627" y="2820924"/>
             <a:ext cx="734568" cy="347472"/>
           </a:xfrm>
           <a:prstGeom prst="rect">
@@ -8434,8 +8434,8 @@
         </p:nvSpPr>
         <p:spPr>
           <a:xfrm>
-            <a:off x="6448044" y="2766060"/>
-            <a:ext cx="3816096" cy="457200"/>
+            <a:off x="6304195" y="2766060"/>
+            <a:ext cx="3591692" cy="457200"/>
           </a:xfrm>
           <a:prstGeom prst="rect">
             <a:avLst/>
@@ -8444,7 +8444,7 @@
         </p:spPr>
         <p:txBody>
           <a:bodyPr wrap="none" lIns="45720" rIns="45720" tIns="18288" bIns="18288" anchor="ctr">
-            <a:spAutoFit/>
+            <a:noAutofit/>
           </a:bodyPr>
           <a:lstStyle/>
           <a:p>
@@ -10803,7 +10803,7 @@
       </p:sp>
       <p:pic>
         <p:nvPicPr>
-          <p:cNvPr id="9" name="Picture 8" descr="3cbc9462cebf8a55.png"/>
+          <p:cNvPr id="9" name="Picture 8" descr="a9b3bfaec72a6e92.png"/>
           <p:cNvPicPr>
             <a:picLocks noChangeAspect="1"/>
           </p:cNvPicPr>
@@ -10817,8 +10817,8 @@
         </p:blipFill>
         <p:spPr>
           <a:xfrm>
-            <a:off x="5740907" y="2194560"/>
-            <a:ext cx="679704" cy="762000"/>
+            <a:off x="5596127" y="2194560"/>
+            <a:ext cx="969264" cy="1011936"/>
           </a:xfrm>
           <a:prstGeom prst="rect">
             <a:avLst/>
@@ -10833,7 +10833,7 @@
         </p:nvSpPr>
         <p:spPr>
           <a:xfrm>
-            <a:off x="777240" y="3185160"/>
+            <a:off x="777240" y="3435096"/>
             <a:ext cx="10607040" cy="465151"/>
           </a:xfrm>
           <a:prstGeom prst="rect">
@@ -10868,7 +10868,7 @@
         </p:nvSpPr>
         <p:spPr>
           <a:xfrm>
-            <a:off x="1874519" y="3851479"/>
+            <a:off x="1874519" y="4101415"/>
             <a:ext cx="4572000" cy="548640"/>
           </a:xfrm>
           <a:prstGeom prst="rect">
@@ -10921,7 +10921,7 @@
         </p:nvSpPr>
         <p:spPr>
           <a:xfrm>
-            <a:off x="6629400" y="3851479"/>
+            <a:off x="6629400" y="4101415"/>
             <a:ext cx="4572000" cy="548640"/>
           </a:xfrm>
           <a:prstGeom prst="rect">
@@ -10974,7 +10974,7 @@
         </p:nvSpPr>
         <p:spPr>
           <a:xfrm>
-            <a:off x="1874519" y="4537279"/>
+            <a:off x="1874519" y="4787215"/>
             <a:ext cx="4572000" cy="548640"/>
           </a:xfrm>
           <a:prstGeom prst="rect">
@@ -11027,7 +11027,7 @@
         </p:nvSpPr>
         <p:spPr>
           <a:xfrm>
-            <a:off x="6629400" y="4537279"/>
+            <a:off x="6629400" y="4787215"/>
             <a:ext cx="4572000" cy="548640"/>
           </a:xfrm>
           <a:prstGeom prst="rect">
@@ -11080,7 +11080,7 @@
         </p:nvSpPr>
         <p:spPr>
           <a:xfrm>
-            <a:off x="777240" y="5543119"/>
+            <a:off x="777240" y="5687568"/>
             <a:ext cx="10607040" cy="457200"/>
           </a:xfrm>
           <a:prstGeom prst="rect">
@@ -11372,7 +11372,7 @@
       </p:sp>
       <p:pic>
         <p:nvPicPr>
-          <p:cNvPr id="9" name="Picture 8" descr="3cbc9462cebf8a55.png"/>
+          <p:cNvPr id="9" name="Picture 8" descr="a9b3bfaec72a6e92.png"/>
           <p:cNvPicPr>
             <a:picLocks noChangeAspect="1"/>
           </p:cNvPicPr>
@@ -11386,8 +11386,8 @@
         </p:blipFill>
         <p:spPr>
           <a:xfrm>
-            <a:off x="5740907" y="2103120"/>
-            <a:ext cx="679704" cy="762000"/>
+            <a:off x="5596127" y="2103120"/>
+            <a:ext cx="969264" cy="1011936"/>
           </a:xfrm>
           <a:prstGeom prst="rect">
             <a:avLst/>
@@ -11402,7 +11402,7 @@
         </p:nvSpPr>
         <p:spPr>
           <a:xfrm>
-            <a:off x="777240" y="3093720"/>
+            <a:off x="777240" y="3343655"/>
             <a:ext cx="10607040" cy="465151"/>
           </a:xfrm>
           <a:prstGeom prst="rect">
@@ -11437,7 +11437,7 @@
         </p:nvSpPr>
         <p:spPr>
           <a:xfrm>
-            <a:off x="1874519" y="3760039"/>
+            <a:off x="1874519" y="4009975"/>
             <a:ext cx="4572000" cy="548640"/>
           </a:xfrm>
           <a:prstGeom prst="rect">
@@ -11490,7 +11490,7 @@
         </p:nvSpPr>
         <p:spPr>
           <a:xfrm>
-            <a:off x="6629400" y="3760039"/>
+            <a:off x="6629400" y="4009975"/>
             <a:ext cx="4572000" cy="548640"/>
           </a:xfrm>
           <a:prstGeom prst="rect">
@@ -11543,7 +11543,7 @@
         </p:nvSpPr>
         <p:spPr>
           <a:xfrm>
-            <a:off x="1874519" y="4445839"/>
+            <a:off x="1874519" y="4695775"/>
             <a:ext cx="4572000" cy="548640"/>
           </a:xfrm>
           <a:prstGeom prst="rect">
@@ -11596,7 +11596,7 @@
         </p:nvSpPr>
         <p:spPr>
           <a:xfrm>
-            <a:off x="6629400" y="4445839"/>
+            <a:off x="6629400" y="4695775"/>
             <a:ext cx="4572000" cy="548640"/>
           </a:xfrm>
           <a:prstGeom prst="rect">
@@ -11649,7 +11649,7 @@
         </p:nvSpPr>
         <p:spPr>
           <a:xfrm>
-            <a:off x="777240" y="5451679"/>
+            <a:off x="777240" y="5632704"/>
             <a:ext cx="10607040" cy="548640"/>
           </a:xfrm>
           <a:prstGeom prst="rect">
@@ -11950,7 +11950,7 @@
       </p:sp>
       <p:pic>
         <p:nvPicPr>
-          <p:cNvPr id="9" name="Picture 8" descr="b7f37a3c9e4308d1.png"/>
+          <p:cNvPr id="9" name="Picture 8" descr="85c3b95db630c6f5.png"/>
           <p:cNvPicPr>
             <a:picLocks noChangeAspect="1"/>
           </p:cNvPicPr>
@@ -11964,8 +11964,8 @@
         </p:blipFill>
         <p:spPr>
           <a:xfrm>
-            <a:off x="5698236" y="2194560"/>
-            <a:ext cx="765048" cy="762000"/>
+            <a:off x="5536692" y="2194560"/>
+            <a:ext cx="1088136" cy="1021080"/>
           </a:xfrm>
           <a:prstGeom prst="rect">
             <a:avLst/>
@@ -12307,7 +12307,7 @@
       </p:sp>
       <p:pic>
         <p:nvPicPr>
-          <p:cNvPr id="9" name="Picture 8" descr="b7f37a3c9e4308d1.png"/>
+          <p:cNvPr id="9" name="Picture 8" descr="85c3b95db630c6f5.png"/>
           <p:cNvPicPr>
             <a:picLocks noChangeAspect="1"/>
           </p:cNvPicPr>
@@ -12321,8 +12321,8 @@
         </p:blipFill>
         <p:spPr>
           <a:xfrm>
-            <a:off x="5698236" y="2103120"/>
-            <a:ext cx="765048" cy="762000"/>
+            <a:off x="5536692" y="2103120"/>
+            <a:ext cx="1088136" cy="1021080"/>
           </a:xfrm>
           <a:prstGeom prst="rect">
             <a:avLst/>
@@ -12337,7 +12337,7 @@
         </p:nvSpPr>
         <p:spPr>
           <a:xfrm>
-            <a:off x="1828800" y="3139440"/>
+            <a:off x="1828800" y="3398519"/>
             <a:ext cx="8503920" cy="548640"/>
           </a:xfrm>
           <a:prstGeom prst="rect">
@@ -12748,8 +12748,8 @@
         </p:nvSpPr>
         <p:spPr>
           <a:xfrm>
-            <a:off x="4280408" y="2171700"/>
-            <a:ext cx="3300984" cy="457200"/>
+            <a:off x="4444343" y="2171700"/>
+            <a:ext cx="3047533" cy="457200"/>
           </a:xfrm>
           <a:prstGeom prst="rect">
             <a:avLst/>
@@ -12758,7 +12758,7 @@
         </p:spPr>
         <p:txBody>
           <a:bodyPr wrap="none" lIns="45720" rIns="45720" tIns="18288" bIns="18288" anchor="ctr">
-            <a:spAutoFit/>
+            <a:noAutofit/>
           </a:bodyPr>
           <a:lstStyle/>
           <a:p>
@@ -12791,7 +12791,7 @@
         </p:blipFill>
         <p:spPr>
           <a:xfrm>
-            <a:off x="7444232" y="2308860"/>
+            <a:off x="7354716" y="2308860"/>
             <a:ext cx="192024" cy="182880"/>
           </a:xfrm>
           <a:prstGeom prst="rect">
@@ -12807,8 +12807,8 @@
         </p:nvSpPr>
         <p:spPr>
           <a:xfrm>
-            <a:off x="7636256" y="2171700"/>
-            <a:ext cx="382016" cy="457200"/>
+            <a:off x="7546740" y="2171700"/>
+            <a:ext cx="307595" cy="457200"/>
           </a:xfrm>
           <a:prstGeom prst="rect">
             <a:avLst/>
@@ -12817,7 +12817,7 @@
         </p:spPr>
         <p:txBody>
           <a:bodyPr wrap="none" lIns="45720" rIns="45720" tIns="18288" bIns="18288" anchor="ctr">
-            <a:spAutoFit/>
+            <a:noAutofit/>
           </a:bodyPr>
           <a:lstStyle/>
           <a:p>
@@ -13200,7 +13200,7 @@
         <p:spPr>
           <a:xfrm>
             <a:off x="1874519" y="1760220"/>
-            <a:ext cx="3551936" cy="457200"/>
+            <a:ext cx="3058734" cy="457200"/>
           </a:xfrm>
           <a:prstGeom prst="rect">
             <a:avLst/>
@@ -13209,7 +13209,7 @@
         </p:spPr>
         <p:txBody>
           <a:bodyPr wrap="none" lIns="45720" rIns="45720" tIns="18288" bIns="18288" anchor="ctr">
-            <a:spAutoFit/>
+            <a:noAutofit/>
           </a:bodyPr>
           <a:lstStyle/>
           <a:p>
@@ -13242,7 +13242,7 @@
         </p:blipFill>
         <p:spPr>
           <a:xfrm>
-            <a:off x="5289296" y="1821180"/>
+            <a:off x="4796094" y="1821180"/>
             <a:ext cx="1267968" cy="335280"/>
           </a:xfrm>
           <a:prstGeom prst="rect">
@@ -13258,8 +13258,8 @@
         </p:nvSpPr>
         <p:spPr>
           <a:xfrm>
-            <a:off x="7105904" y="1760220"/>
-            <a:ext cx="379729" cy="457200"/>
+            <a:off x="6612702" y="1760220"/>
+            <a:ext cx="388052" cy="457200"/>
           </a:xfrm>
           <a:prstGeom prst="rect">
             <a:avLst/>
@@ -13268,7 +13268,7 @@
         </p:spPr>
         <p:txBody>
           <a:bodyPr wrap="none" lIns="45720" rIns="45720" tIns="18288" bIns="18288" anchor="ctr">
-            <a:spAutoFit/>
+            <a:noAutofit/>
           </a:bodyPr>
           <a:lstStyle/>
           <a:p>
@@ -13293,8 +13293,8 @@
         </p:nvSpPr>
         <p:spPr>
           <a:xfrm>
-            <a:off x="1874519" y="2414016"/>
-            <a:ext cx="4159504" cy="457200"/>
+            <a:off x="1874519" y="2499360"/>
+            <a:ext cx="3704805" cy="457200"/>
           </a:xfrm>
           <a:prstGeom prst="rect">
             <a:avLst/>
@@ -13303,7 +13303,7 @@
         </p:spPr>
         <p:txBody>
           <a:bodyPr wrap="none" lIns="45720" rIns="45720" tIns="18288" bIns="18288" anchor="ctr">
-            <a:spAutoFit/>
+            <a:noAutofit/>
           </a:bodyPr>
           <a:lstStyle/>
           <a:p>
@@ -13322,7 +13322,7 @@
       </p:sp>
       <p:pic>
         <p:nvPicPr>
-          <p:cNvPr id="13" name="Picture 12" descr="0e4bbceb5e115730.png"/>
+          <p:cNvPr id="13" name="Picture 12" descr="9d90cf2f49ecc87f.png"/>
           <p:cNvPicPr>
             <a:picLocks noChangeAspect="1"/>
           </p:cNvPicPr>
@@ -13336,8 +13336,8 @@
         </p:blipFill>
         <p:spPr>
           <a:xfrm>
-            <a:off x="5896864" y="2395728"/>
-            <a:ext cx="216408" cy="493776"/>
+            <a:off x="5442165" y="2395728"/>
+            <a:ext cx="304800" cy="664464"/>
           </a:xfrm>
           <a:prstGeom prst="rect">
             <a:avLst/>
@@ -13352,8 +13352,8 @@
         </p:nvSpPr>
         <p:spPr>
           <a:xfrm>
-            <a:off x="6661911" y="2372868"/>
-            <a:ext cx="1396238" cy="457200"/>
+            <a:off x="6295605" y="2372868"/>
+            <a:ext cx="1215387" cy="457200"/>
           </a:xfrm>
           <a:prstGeom prst="rect">
             <a:avLst/>
@@ -13362,7 +13362,7 @@
         </p:spPr>
         <p:txBody>
           <a:bodyPr wrap="none" lIns="45720" rIns="45720" tIns="18288" bIns="18288" anchor="ctr">
-            <a:spAutoFit/>
+            <a:noAutofit/>
           </a:bodyPr>
           <a:lstStyle/>
           <a:p>
@@ -13405,8 +13405,8 @@
         </p:nvSpPr>
         <p:spPr>
           <a:xfrm>
-            <a:off x="1874519" y="3067812"/>
-            <a:ext cx="969771" cy="457200"/>
+            <a:off x="1874519" y="3238500"/>
+            <a:ext cx="726811" cy="457200"/>
           </a:xfrm>
           <a:prstGeom prst="rect">
             <a:avLst/>
@@ -13415,7 +13415,7 @@
         </p:spPr>
         <p:txBody>
           <a:bodyPr wrap="none" lIns="45720" rIns="45720" tIns="18288" bIns="18288" anchor="ctr">
-            <a:spAutoFit/>
+            <a:noAutofit/>
           </a:bodyPr>
           <a:lstStyle/>
           <a:p>
@@ -13448,7 +13448,7 @@
         </p:blipFill>
         <p:spPr>
           <a:xfrm>
-            <a:off x="2707132" y="3092196"/>
+            <a:off x="2464171" y="3262884"/>
             <a:ext cx="688848" cy="408432"/>
           </a:xfrm>
           <a:prstGeom prst="rect">
@@ -13464,8 +13464,8 @@
         </p:nvSpPr>
         <p:spPr>
           <a:xfrm>
-            <a:off x="3395980" y="3067812"/>
-            <a:ext cx="5678424" cy="457200"/>
+            <a:off x="3153019" y="3238500"/>
+            <a:ext cx="5733570" cy="457200"/>
           </a:xfrm>
           <a:prstGeom prst="rect">
             <a:avLst/>
@@ -13474,7 +13474,7 @@
         </p:spPr>
         <p:txBody>
           <a:bodyPr wrap="none" lIns="45720" rIns="45720" tIns="18288" bIns="18288" anchor="ctr">
-            <a:spAutoFit/>
+            <a:noAutofit/>
           </a:bodyPr>
           <a:lstStyle/>
           <a:p>
@@ -13499,8 +13499,8 @@
         </p:nvSpPr>
         <p:spPr>
           <a:xfrm>
-            <a:off x="9485884" y="3067812"/>
-            <a:ext cx="1396238" cy="457200"/>
+            <a:off x="9298069" y="3238500"/>
+            <a:ext cx="1351321" cy="457200"/>
           </a:xfrm>
           <a:prstGeom prst="rect">
             <a:avLst/>
@@ -13509,7 +13509,7 @@
         </p:spPr>
         <p:txBody>
           <a:bodyPr wrap="none" lIns="45720" rIns="45720" tIns="18288" bIns="18288" anchor="ctr">
-            <a:spAutoFit/>
+            <a:noAutofit/>
           </a:bodyPr>
           <a:lstStyle/>
           <a:p>
@@ -13534,8 +13534,8 @@
         </p:nvSpPr>
         <p:spPr>
           <a:xfrm>
-            <a:off x="1874519" y="3680460"/>
-            <a:ext cx="4767072" cy="457200"/>
+            <a:off x="1874519" y="3851147"/>
+            <a:ext cx="4347668" cy="457200"/>
           </a:xfrm>
           <a:prstGeom prst="rect">
             <a:avLst/>
@@ -13544,7 +13544,7 @@
         </p:spPr>
         <p:txBody>
           <a:bodyPr wrap="none" lIns="45720" rIns="45720" tIns="18288" bIns="18288" anchor="ctr">
-            <a:spAutoFit/>
+            <a:noAutofit/>
           </a:bodyPr>
           <a:lstStyle/>
           <a:p>
@@ -13577,7 +13577,7 @@
         </p:blipFill>
         <p:spPr>
           <a:xfrm>
-            <a:off x="6504432" y="3802380"/>
+            <a:off x="6085028" y="3973068"/>
             <a:ext cx="1499616" cy="213360"/>
           </a:xfrm>
           <a:prstGeom prst="rect">
@@ -13601,7 +13601,7 @@
         </p:blipFill>
         <p:spPr>
           <a:xfrm>
-            <a:off x="8552688" y="3738372"/>
+            <a:off x="8133284" y="3909059"/>
             <a:ext cx="280416" cy="341376"/>
           </a:xfrm>
           <a:prstGeom prst="rect">
@@ -13880,8 +13880,8 @@
         </p:nvSpPr>
         <p:spPr>
           <a:xfrm>
-            <a:off x="4280408" y="2080260"/>
-            <a:ext cx="3300984" cy="457200"/>
+            <a:off x="4444343" y="2080260"/>
+            <a:ext cx="3047533" cy="457200"/>
           </a:xfrm>
           <a:prstGeom prst="rect">
             <a:avLst/>
@@ -13890,7 +13890,7 @@
         </p:spPr>
         <p:txBody>
           <a:bodyPr wrap="none" lIns="45720" rIns="45720" tIns="18288" bIns="18288" anchor="ctr">
-            <a:spAutoFit/>
+            <a:noAutofit/>
           </a:bodyPr>
           <a:lstStyle/>
           <a:p>
@@ -13923,7 +13923,7 @@
         </p:blipFill>
         <p:spPr>
           <a:xfrm>
-            <a:off x="7444232" y="2217420"/>
+            <a:off x="7354716" y="2217420"/>
             <a:ext cx="192024" cy="182880"/>
           </a:xfrm>
           <a:prstGeom prst="rect">
@@ -13939,8 +13939,8 @@
         </p:nvSpPr>
         <p:spPr>
           <a:xfrm>
-            <a:off x="7636256" y="2080260"/>
-            <a:ext cx="382016" cy="457200"/>
+            <a:off x="7546740" y="2080260"/>
+            <a:ext cx="307595" cy="457200"/>
           </a:xfrm>
           <a:prstGeom prst="rect">
             <a:avLst/>
@@ -13949,7 +13949,7 @@
         </p:spPr>
         <p:txBody>
           <a:bodyPr wrap="none" lIns="45720" rIns="45720" tIns="18288" bIns="18288" anchor="ctr">
-            <a:spAutoFit/>
+            <a:noAutofit/>
           </a:bodyPr>
           <a:lstStyle/>
           <a:p>
@@ -14331,8 +14331,8 @@
         </p:nvSpPr>
         <p:spPr>
           <a:xfrm>
-            <a:off x="732536" y="2176272"/>
-            <a:ext cx="2785872" cy="457200"/>
+            <a:off x="997268" y="2176272"/>
+            <a:ext cx="2615224" cy="457200"/>
           </a:xfrm>
           <a:prstGeom prst="rect">
             <a:avLst/>
@@ -14341,7 +14341,7 @@
         </p:spPr>
         <p:txBody>
           <a:bodyPr wrap="none" lIns="45720" rIns="45720" tIns="18288" bIns="18288" anchor="ctr">
-            <a:spAutoFit/>
+            <a:noAutofit/>
           </a:bodyPr>
           <a:lstStyle/>
           <a:p>
@@ -14374,7 +14374,7 @@
         </p:blipFill>
         <p:spPr>
           <a:xfrm>
-            <a:off x="3381248" y="2194560"/>
+            <a:off x="3475333" y="2194560"/>
             <a:ext cx="1335024" cy="420624"/>
           </a:xfrm>
           <a:prstGeom prst="rect">
@@ -14390,8 +14390,8 @@
         </p:nvSpPr>
         <p:spPr>
           <a:xfrm>
-            <a:off x="4716272" y="2176272"/>
-            <a:ext cx="1240536" cy="457200"/>
+            <a:off x="4810357" y="2176272"/>
+            <a:ext cx="956138" cy="457200"/>
           </a:xfrm>
           <a:prstGeom prst="rect">
             <a:avLst/>
@@ -14400,7 +14400,7 @@
         </p:spPr>
         <p:txBody>
           <a:bodyPr wrap="none" lIns="45720" rIns="45720" tIns="18288" bIns="18288" anchor="ctr">
-            <a:spAutoFit/>
+            <a:noAutofit/>
           </a:bodyPr>
           <a:lstStyle/>
           <a:p>
@@ -14433,7 +14433,7 @@
         </p:blipFill>
         <p:spPr>
           <a:xfrm>
-            <a:off x="5819648" y="2225040"/>
+            <a:off x="5629335" y="2225040"/>
             <a:ext cx="5364480" cy="359664"/>
           </a:xfrm>
           <a:prstGeom prst="rect">
@@ -14449,8 +14449,8 @@
         </p:nvSpPr>
         <p:spPr>
           <a:xfrm>
-            <a:off x="11184128" y="2176272"/>
-            <a:ext cx="382016" cy="457200"/>
+            <a:off x="10993815" y="2176272"/>
+            <a:ext cx="307595" cy="457200"/>
           </a:xfrm>
           <a:prstGeom prst="rect">
             <a:avLst/>
@@ -14459,7 +14459,7 @@
         </p:spPr>
         <p:txBody>
           <a:bodyPr wrap="none" lIns="45720" rIns="45720" tIns="18288" bIns="18288" anchor="ctr">
-            <a:spAutoFit/>
+            <a:noAutofit/>
           </a:bodyPr>
           <a:lstStyle/>
           <a:p>
@@ -14484,8 +14484,8 @@
         </p:nvSpPr>
         <p:spPr>
           <a:xfrm>
-            <a:off x="999235" y="2872739"/>
-            <a:ext cx="3987800" cy="457200"/>
+            <a:off x="1430629" y="2872739"/>
+            <a:ext cx="3534689" cy="457200"/>
           </a:xfrm>
           <a:prstGeom prst="rect">
             <a:avLst/>
@@ -14494,7 +14494,7 @@
         </p:spPr>
         <p:txBody>
           <a:bodyPr wrap="none" lIns="45720" rIns="45720" tIns="18288" bIns="18288" anchor="ctr">
-            <a:spAutoFit/>
+            <a:noAutofit/>
           </a:bodyPr>
           <a:lstStyle/>
           <a:p>
@@ -14527,7 +14527,7 @@
         </p:blipFill>
         <p:spPr>
           <a:xfrm>
-            <a:off x="4849876" y="2889503"/>
+            <a:off x="4828159" y="2889503"/>
             <a:ext cx="1603248" cy="423672"/>
           </a:xfrm>
           <a:prstGeom prst="rect">
@@ -14543,8 +14543,8 @@
         </p:nvSpPr>
         <p:spPr>
           <a:xfrm>
-            <a:off x="6453124" y="2872739"/>
-            <a:ext cx="4846320" cy="457200"/>
+            <a:off x="6431407" y="2872739"/>
+            <a:ext cx="4436643" cy="457200"/>
           </a:xfrm>
           <a:prstGeom prst="rect">
             <a:avLst/>
@@ -14553,7 +14553,7 @@
         </p:spPr>
         <p:txBody>
           <a:bodyPr wrap="none" lIns="45720" rIns="45720" tIns="18288" bIns="18288" anchor="ctr">
-            <a:spAutoFit/>
+            <a:noAutofit/>
           </a:bodyPr>
           <a:lstStyle/>
           <a:p>
@@ -14911,8 +14911,8 @@
         </p:nvSpPr>
         <p:spPr>
           <a:xfrm>
-            <a:off x="732536" y="2084831"/>
-            <a:ext cx="2785872" cy="457200"/>
+            <a:off x="997268" y="2084831"/>
+            <a:ext cx="2615224" cy="457200"/>
           </a:xfrm>
           <a:prstGeom prst="rect">
             <a:avLst/>
@@ -14921,7 +14921,7 @@
         </p:spPr>
         <p:txBody>
           <a:bodyPr wrap="none" lIns="45720" rIns="45720" tIns="18288" bIns="18288" anchor="ctr">
-            <a:spAutoFit/>
+            <a:noAutofit/>
           </a:bodyPr>
           <a:lstStyle/>
           <a:p>
@@ -14954,7 +14954,7 @@
         </p:blipFill>
         <p:spPr>
           <a:xfrm>
-            <a:off x="3381248" y="2103120"/>
+            <a:off x="3475333" y="2103120"/>
             <a:ext cx="1335024" cy="420624"/>
           </a:xfrm>
           <a:prstGeom prst="rect">
@@ -14970,8 +14970,8 @@
         </p:nvSpPr>
         <p:spPr>
           <a:xfrm>
-            <a:off x="4716272" y="2084831"/>
-            <a:ext cx="1240536" cy="457200"/>
+            <a:off x="4810357" y="2084831"/>
+            <a:ext cx="956138" cy="457200"/>
           </a:xfrm>
           <a:prstGeom prst="rect">
             <a:avLst/>
@@ -14980,7 +14980,7 @@
         </p:spPr>
         <p:txBody>
           <a:bodyPr wrap="none" lIns="45720" rIns="45720" tIns="18288" bIns="18288" anchor="ctr">
-            <a:spAutoFit/>
+            <a:noAutofit/>
           </a:bodyPr>
           <a:lstStyle/>
           <a:p>
@@ -15013,7 +15013,7 @@
         </p:blipFill>
         <p:spPr>
           <a:xfrm>
-            <a:off x="5819648" y="2133599"/>
+            <a:off x="5629335" y="2133599"/>
             <a:ext cx="5364480" cy="359664"/>
           </a:xfrm>
           <a:prstGeom prst="rect">
@@ -15029,8 +15029,8 @@
         </p:nvSpPr>
         <p:spPr>
           <a:xfrm>
-            <a:off x="11184128" y="2084831"/>
-            <a:ext cx="382016" cy="457200"/>
+            <a:off x="10993815" y="2084831"/>
+            <a:ext cx="307595" cy="457200"/>
           </a:xfrm>
           <a:prstGeom prst="rect">
             <a:avLst/>
@@ -15039,7 +15039,7 @@
         </p:spPr>
         <p:txBody>
           <a:bodyPr wrap="none" lIns="45720" rIns="45720" tIns="18288" bIns="18288" anchor="ctr">
-            <a:spAutoFit/>
+            <a:noAutofit/>
           </a:bodyPr>
           <a:lstStyle/>
           <a:p>
@@ -15064,8 +15064,8 @@
         </p:nvSpPr>
         <p:spPr>
           <a:xfrm>
-            <a:off x="999235" y="2781299"/>
-            <a:ext cx="3987800" cy="457200"/>
+            <a:off x="1430629" y="2781299"/>
+            <a:ext cx="3534689" cy="457200"/>
           </a:xfrm>
           <a:prstGeom prst="rect">
             <a:avLst/>
@@ -15074,7 +15074,7 @@
         </p:spPr>
         <p:txBody>
           <a:bodyPr wrap="none" lIns="45720" rIns="45720" tIns="18288" bIns="18288" anchor="ctr">
-            <a:spAutoFit/>
+            <a:noAutofit/>
           </a:bodyPr>
           <a:lstStyle/>
           <a:p>
@@ -15107,7 +15107,7 @@
         </p:blipFill>
         <p:spPr>
           <a:xfrm>
-            <a:off x="4849876" y="2798063"/>
+            <a:off x="4828159" y="2798063"/>
             <a:ext cx="1603248" cy="423672"/>
           </a:xfrm>
           <a:prstGeom prst="rect">
@@ -15123,8 +15123,8 @@
         </p:nvSpPr>
         <p:spPr>
           <a:xfrm>
-            <a:off x="6453124" y="2781299"/>
-            <a:ext cx="4846320" cy="457200"/>
+            <a:off x="6431407" y="2781299"/>
+            <a:ext cx="4436643" cy="457200"/>
           </a:xfrm>
           <a:prstGeom prst="rect">
             <a:avLst/>
@@ -15133,7 +15133,7 @@
         </p:spPr>
         <p:txBody>
           <a:bodyPr wrap="none" lIns="45720" rIns="45720" tIns="18288" bIns="18288" anchor="ctr">
-            <a:spAutoFit/>
+            <a:noAutofit/>
           </a:bodyPr>
           <a:lstStyle/>
           <a:p>
@@ -16709,7 +16709,7 @@
         </p:blipFill>
         <p:spPr>
           <a:xfrm>
-            <a:off x="1931924" y="2340864"/>
+            <a:off x="2304024" y="2340864"/>
             <a:ext cx="4245864" cy="414528"/>
           </a:xfrm>
           <a:prstGeom prst="rect">
@@ -16725,8 +16725,8 @@
         </p:nvSpPr>
         <p:spPr>
           <a:xfrm>
-            <a:off x="6177788" y="2319528"/>
-            <a:ext cx="1927352" cy="457200"/>
+            <a:off x="6549888" y="2319528"/>
+            <a:ext cx="1183151" cy="457200"/>
           </a:xfrm>
           <a:prstGeom prst="rect">
             <a:avLst/>
@@ -16735,7 +16735,7 @@
         </p:spPr>
         <p:txBody>
           <a:bodyPr wrap="none" lIns="45720" rIns="45720" tIns="18288" bIns="18288" anchor="ctr">
-            <a:spAutoFit/>
+            <a:noAutofit/>
           </a:bodyPr>
           <a:lstStyle/>
           <a:p>
@@ -16768,7 +16768,7 @@
         </p:blipFill>
         <p:spPr>
           <a:xfrm>
-            <a:off x="7967980" y="2394204"/>
+            <a:off x="7595879" y="2394204"/>
             <a:ext cx="2261616" cy="307848"/>
           </a:xfrm>
           <a:prstGeom prst="rect">
@@ -16844,7 +16844,7 @@
         <p:spPr>
           <a:xfrm>
             <a:off x="987552" y="4479035"/>
-            <a:ext cx="5678424" cy="457200"/>
+            <a:ext cx="5144240" cy="457200"/>
           </a:xfrm>
           <a:prstGeom prst="rect">
             <a:avLst/>
@@ -16853,7 +16853,7 @@
         </p:spPr>
         <p:txBody>
           <a:bodyPr wrap="none" lIns="45720" rIns="45720" tIns="18288" bIns="18288" anchor="ctr">
-            <a:spAutoFit/>
+            <a:noAutofit/>
           </a:bodyPr>
           <a:lstStyle/>
           <a:p>
@@ -16886,7 +16886,7 @@
         </p:blipFill>
         <p:spPr>
           <a:xfrm>
-            <a:off x="6528816" y="4495799"/>
+            <a:off x="5994632" y="4495799"/>
             <a:ext cx="2618232" cy="423672"/>
           </a:xfrm>
           <a:prstGeom prst="rect">
@@ -17208,7 +17208,7 @@
         </p:blipFill>
         <p:spPr>
           <a:xfrm>
-            <a:off x="2177288" y="2340864"/>
+            <a:off x="2549388" y="2340864"/>
             <a:ext cx="4224528" cy="411480"/>
           </a:xfrm>
           <a:prstGeom prst="rect">
@@ -17224,8 +17224,8 @@
         </p:nvSpPr>
         <p:spPr>
           <a:xfrm>
-            <a:off x="6401816" y="2318004"/>
-            <a:ext cx="1927352" cy="457200"/>
+            <a:off x="6773916" y="2318004"/>
+            <a:ext cx="1183151" cy="457200"/>
           </a:xfrm>
           <a:prstGeom prst="rect">
             <a:avLst/>
@@ -17234,7 +17234,7 @@
         </p:spPr>
         <p:txBody>
           <a:bodyPr wrap="none" lIns="45720" rIns="45720" tIns="18288" bIns="18288" anchor="ctr">
-            <a:spAutoFit/>
+            <a:noAutofit/>
           </a:bodyPr>
           <a:lstStyle/>
           <a:p>
@@ -17267,7 +17267,7 @@
         </p:blipFill>
         <p:spPr>
           <a:xfrm>
-            <a:off x="8192008" y="2372868"/>
+            <a:off x="7819907" y="2372868"/>
             <a:ext cx="1792224" cy="347472"/>
           </a:xfrm>
           <a:prstGeom prst="rect">
@@ -17291,7 +17291,7 @@
         </p:blipFill>
         <p:spPr>
           <a:xfrm>
-            <a:off x="1628648" y="3026664"/>
+            <a:off x="2000748" y="3026664"/>
             <a:ext cx="3727704" cy="423672"/>
           </a:xfrm>
           <a:prstGeom prst="rect">
@@ -17307,8 +17307,8 @@
         </p:nvSpPr>
         <p:spPr>
           <a:xfrm>
-            <a:off x="5356352" y="3009900"/>
-            <a:ext cx="1927352" cy="457200"/>
+            <a:off x="5728452" y="3009900"/>
+            <a:ext cx="1183151" cy="457200"/>
           </a:xfrm>
           <a:prstGeom prst="rect">
             <a:avLst/>
@@ -17317,7 +17317,7 @@
         </p:spPr>
         <p:txBody>
           <a:bodyPr wrap="none" lIns="45720" rIns="45720" tIns="18288" bIns="18288" anchor="ctr">
-            <a:spAutoFit/>
+            <a:noAutofit/>
           </a:bodyPr>
           <a:lstStyle/>
           <a:p>
@@ -17350,7 +17350,7 @@
         </p:blipFill>
         <p:spPr>
           <a:xfrm>
-            <a:off x="7146544" y="3026664"/>
+            <a:off x="6774443" y="3026664"/>
             <a:ext cx="3386328" cy="423672"/>
           </a:xfrm>
           <a:prstGeom prst="rect">
@@ -17693,7 +17693,7 @@
       </p:cxnSp>
       <p:pic>
         <p:nvPicPr>
-          <p:cNvPr id="10" name="Picture 9" descr="5bddf10174d673a2.png"/>
+          <p:cNvPr id="10" name="Picture 9" descr="c608c8ddc90838eb.png"/>
           <p:cNvPicPr>
             <a:picLocks noChangeAspect="1"/>
           </p:cNvPicPr>
@@ -17707,8 +17707,8 @@
         </p:blipFill>
         <p:spPr>
           <a:xfrm>
-            <a:off x="2716783" y="2340864"/>
-            <a:ext cx="3355848" cy="600456"/>
+            <a:off x="2567676" y="2340864"/>
+            <a:ext cx="4267200" cy="807720"/>
           </a:xfrm>
           <a:prstGeom prst="rect">
             <a:avLst/>
@@ -17723,8 +17723,8 @@
         </p:nvSpPr>
         <p:spPr>
           <a:xfrm>
-            <a:off x="6072631" y="2412492"/>
-            <a:ext cx="1927352" cy="457200"/>
+            <a:off x="6834876" y="2516124"/>
+            <a:ext cx="1183151" cy="457200"/>
           </a:xfrm>
           <a:prstGeom prst="rect">
             <a:avLst/>
@@ -17733,7 +17733,7 @@
         </p:spPr>
         <p:txBody>
           <a:bodyPr wrap="none" lIns="45720" rIns="45720" tIns="18288" bIns="18288" anchor="ctr">
-            <a:spAutoFit/>
+            <a:noAutofit/>
           </a:bodyPr>
           <a:lstStyle/>
           <a:p>
@@ -17752,7 +17752,7 @@
       </p:sp>
       <p:pic>
         <p:nvPicPr>
-          <p:cNvPr id="12" name="Picture 11" descr="22d0399b0effef2b.png"/>
+          <p:cNvPr id="12" name="Picture 11" descr="ad442dfcdf460139.png"/>
           <p:cNvPicPr>
             <a:picLocks noChangeAspect="1"/>
           </p:cNvPicPr>
@@ -17766,8 +17766,8 @@
         </p:blipFill>
         <p:spPr>
           <a:xfrm>
-            <a:off x="7862823" y="2385060"/>
-            <a:ext cx="1581912" cy="512064"/>
+            <a:off x="7880867" y="2406396"/>
+            <a:ext cx="1712976" cy="676656"/>
           </a:xfrm>
           <a:prstGeom prst="rect">
             <a:avLst/>
@@ -17776,7 +17776,7 @@
       </p:pic>
       <p:pic>
         <p:nvPicPr>
-          <p:cNvPr id="13" name="Picture 12" descr="4d617de5ab5dff91.png"/>
+          <p:cNvPr id="13" name="Picture 12" descr="f9fd1262257d1ea0.png"/>
           <p:cNvPicPr>
             <a:picLocks noChangeAspect="1"/>
           </p:cNvPicPr>
@@ -17790,8 +17790,8 @@
         </p:blipFill>
         <p:spPr>
           <a:xfrm>
-            <a:off x="3020060" y="3215640"/>
-            <a:ext cx="1560576" cy="609600"/>
+            <a:off x="3142224" y="3422904"/>
+            <a:ext cx="1798320" cy="810768"/>
           </a:xfrm>
           <a:prstGeom prst="rect">
             <a:avLst/>
@@ -17806,8 +17806,8 @@
         </p:nvSpPr>
         <p:spPr>
           <a:xfrm>
-            <a:off x="4580636" y="3291840"/>
-            <a:ext cx="1927352" cy="457200"/>
+            <a:off x="4940544" y="3599688"/>
+            <a:ext cx="1183151" cy="457200"/>
           </a:xfrm>
           <a:prstGeom prst="rect">
             <a:avLst/>
@@ -17816,7 +17816,7 @@
         </p:spPr>
         <p:txBody>
           <a:bodyPr wrap="none" lIns="45720" rIns="45720" tIns="18288" bIns="18288" anchor="ctr">
-            <a:spAutoFit/>
+            <a:noAutofit/>
           </a:bodyPr>
           <a:lstStyle/>
           <a:p>
@@ -17835,7 +17835,7 @@
       </p:sp>
       <p:pic>
         <p:nvPicPr>
-          <p:cNvPr id="15" name="Picture 14" descr="bd4bc4141429a359.png"/>
+          <p:cNvPr id="15" name="Picture 14" descr="8939158b4e4e12e5.png"/>
           <p:cNvPicPr>
             <a:picLocks noChangeAspect="1"/>
           </p:cNvPicPr>
@@ -17849,8 +17849,8 @@
         </p:blipFill>
         <p:spPr>
           <a:xfrm>
-            <a:off x="6370828" y="3218688"/>
-            <a:ext cx="2770632" cy="603504"/>
+            <a:off x="5986535" y="3422904"/>
+            <a:ext cx="3032760" cy="810768"/>
           </a:xfrm>
           <a:prstGeom prst="rect">
             <a:avLst/>
@@ -17865,7 +17865,7 @@
         </p:nvSpPr>
         <p:spPr>
           <a:xfrm>
-            <a:off x="987552" y="4163568"/>
+            <a:off x="987552" y="4572000"/>
             <a:ext cx="10131551" cy="475488"/>
           </a:xfrm>
           <a:prstGeom prst="rect">

--- a/a7/build/out/u3/A7 3.T1  Slides.pptx
+++ b/a7/build/out/u3/A7 3.T1  Slides.pptx
@@ -3817,7 +3817,7 @@
       </p:sp>
       <p:pic>
         <p:nvPicPr>
-          <p:cNvPr id="9" name="Picture 8" descr="83ae14ddaf39e79e.png"/>
+          <p:cNvPr id="9" name="Picture 8" descr="6d1502d738698f68.png"/>
           <p:cNvPicPr>
             <a:picLocks noChangeAspect="1"/>
           </p:cNvPicPr>
@@ -3831,8 +3831,8 @@
         </p:blipFill>
         <p:spPr>
           <a:xfrm>
-            <a:off x="4629911" y="2194560"/>
-            <a:ext cx="2901696" cy="518160"/>
+            <a:off x="4628387" y="2194560"/>
+            <a:ext cx="2904744" cy="515112"/>
           </a:xfrm>
           <a:prstGeom prst="rect">
             <a:avLst/>
@@ -3847,7 +3847,7 @@
         </p:nvSpPr>
         <p:spPr>
           <a:xfrm>
-            <a:off x="777240" y="3032760"/>
+            <a:off x="777240" y="3029712"/>
             <a:ext cx="10607040" cy="429370"/>
           </a:xfrm>
           <a:prstGeom prst="rect">
@@ -4586,7 +4586,7 @@
       </p:sp>
       <p:pic>
         <p:nvPicPr>
-          <p:cNvPr id="9" name="Picture 8" descr="eea818d6e845304f.png"/>
+          <p:cNvPr id="9" name="Picture 8" descr="df4723f2aadc8f77.png"/>
           <p:cNvPicPr>
             <a:picLocks noChangeAspect="1"/>
           </p:cNvPicPr>
@@ -4645,7 +4645,7 @@
       </p:sp>
       <p:pic>
         <p:nvPicPr>
-          <p:cNvPr id="11" name="Picture 10" descr="768f4c680dae22ed.png"/>
+          <p:cNvPr id="11" name="Picture 10" descr="4747b1c9061c5e79.png"/>
           <p:cNvPicPr>
             <a:picLocks noChangeAspect="1"/>
           </p:cNvPicPr>
@@ -4660,7 +4660,7 @@
         <p:spPr>
           <a:xfrm>
             <a:off x="1828800" y="2609087"/>
-            <a:ext cx="5541264" cy="819912"/>
+            <a:ext cx="5550408" cy="819912"/>
           </a:xfrm>
           <a:prstGeom prst="rect">
             <a:avLst/>
@@ -4675,8 +4675,8 @@
         </p:nvSpPr>
         <p:spPr>
           <a:xfrm>
-            <a:off x="7827263" y="2790443"/>
-            <a:ext cx="3557016" cy="502920"/>
+            <a:off x="7836408" y="2790443"/>
+            <a:ext cx="3547871" cy="502920"/>
           </a:xfrm>
           <a:prstGeom prst="rect">
             <a:avLst/>
@@ -5316,7 +5316,7 @@
       </p:sp>
       <p:pic>
         <p:nvPicPr>
-          <p:cNvPr id="9" name="Picture 8" descr="c61e723e73851ee8.png"/>
+          <p:cNvPr id="9" name="Picture 8" descr="f9e02ef50b5c51f5.png"/>
           <p:cNvPicPr>
             <a:picLocks noChangeAspect="1"/>
           </p:cNvPicPr>
@@ -5330,8 +5330,8 @@
         </p:blipFill>
         <p:spPr>
           <a:xfrm>
-            <a:off x="5434583" y="2194560"/>
-            <a:ext cx="1292352" cy="1216152"/>
+            <a:off x="5426964" y="2194560"/>
+            <a:ext cx="1307592" cy="1213104"/>
           </a:xfrm>
           <a:prstGeom prst="rect">
             <a:avLst/>
@@ -5346,7 +5346,7 @@
         </p:nvSpPr>
         <p:spPr>
           <a:xfrm>
-            <a:off x="777240" y="3730752"/>
+            <a:off x="777240" y="3727703"/>
             <a:ext cx="10607040" cy="429370"/>
           </a:xfrm>
           <a:prstGeom prst="rect">
@@ -6066,7 +6066,7 @@
       </p:sp>
       <p:pic>
         <p:nvPicPr>
-          <p:cNvPr id="9" name="Picture 8" descr="d4d3158a21a48776.png"/>
+          <p:cNvPr id="9" name="Picture 8" descr="a84fc3493309665e.png"/>
           <p:cNvPicPr>
             <a:picLocks noChangeAspect="1"/>
           </p:cNvPicPr>
@@ -6804,7 +6804,7 @@
       </p:sp>
       <p:pic>
         <p:nvPicPr>
-          <p:cNvPr id="9" name="Picture 8" descr="df024cff5e9ce158.png"/>
+          <p:cNvPr id="9" name="Picture 8" descr="9934c5774a372f4e.png"/>
           <p:cNvPicPr>
             <a:picLocks noChangeAspect="1"/>
           </p:cNvPicPr>
@@ -6818,8 +6818,8 @@
         </p:blipFill>
         <p:spPr>
           <a:xfrm>
-            <a:off x="5614416" y="2103120"/>
-            <a:ext cx="932688" cy="530352"/>
+            <a:off x="5611367" y="2103120"/>
+            <a:ext cx="938784" cy="527304"/>
           </a:xfrm>
           <a:prstGeom prst="rect">
             <a:avLst/>
@@ -6834,7 +6834,7 @@
         </p:nvSpPr>
         <p:spPr>
           <a:xfrm>
-            <a:off x="1828800" y="2907791"/>
+            <a:off x="1828800" y="2904743"/>
             <a:ext cx="8503920" cy="548640"/>
           </a:xfrm>
           <a:prstGeom prst="rect">
@@ -8310,7 +8310,7 @@
       </p:sp>
       <p:pic>
         <p:nvPicPr>
-          <p:cNvPr id="10" name="Picture 9" descr="7234be0b0114cb8c.png"/>
+          <p:cNvPr id="10" name="Picture 9" descr="d5b036b87b982f98.png"/>
           <p:cNvPicPr>
             <a:picLocks noChangeAspect="1"/>
           </p:cNvPicPr>
@@ -8404,7 +8404,7 @@
       </p:sp>
       <p:pic>
         <p:nvPicPr>
-          <p:cNvPr id="13" name="Picture 12" descr="cf9ea632c43208c2.png"/>
+          <p:cNvPr id="13" name="Picture 12" descr="3d798f50b853a791.png"/>
           <p:cNvPicPr>
             <a:picLocks noChangeAspect="1"/>
           </p:cNvPicPr>
@@ -9248,7 +9248,7 @@
       </p:sp>
       <p:pic>
         <p:nvPicPr>
-          <p:cNvPr id="9" name="Picture 8" descr="4f0d74218b39c7b6.png"/>
+          <p:cNvPr id="9" name="Picture 8" descr="b248a5ef36392be0.png"/>
           <p:cNvPicPr>
             <a:picLocks noChangeAspect="1"/>
           </p:cNvPicPr>
@@ -9262,8 +9262,8 @@
         </p:blipFill>
         <p:spPr>
           <a:xfrm>
-            <a:off x="4759451" y="2103120"/>
-            <a:ext cx="2642616" cy="515112"/>
+            <a:off x="4757928" y="2103120"/>
+            <a:ext cx="2645664" cy="515112"/>
           </a:xfrm>
           <a:prstGeom prst="rect">
             <a:avLst/>
@@ -10225,7 +10225,7 @@
       </p:sp>
       <p:pic>
         <p:nvPicPr>
-          <p:cNvPr id="9" name="Picture 8" descr="6cf649989ec0d514.png"/>
+          <p:cNvPr id="9" name="Picture 8" descr="5f877ce397a50d51.png"/>
           <p:cNvPicPr>
             <a:picLocks noChangeAspect="1"/>
           </p:cNvPicPr>
@@ -10239,8 +10239,8 @@
         </p:blipFill>
         <p:spPr>
           <a:xfrm>
-            <a:off x="5408675" y="2103120"/>
-            <a:ext cx="1344168" cy="518160"/>
+            <a:off x="5407152" y="2103120"/>
+            <a:ext cx="1347216" cy="515112"/>
           </a:xfrm>
           <a:prstGeom prst="rect">
             <a:avLst/>
@@ -10255,7 +10255,7 @@
         </p:nvSpPr>
         <p:spPr>
           <a:xfrm>
-            <a:off x="777240" y="2849879"/>
+            <a:off x="777240" y="2846832"/>
             <a:ext cx="10607040" cy="465151"/>
           </a:xfrm>
           <a:prstGeom prst="rect">
@@ -10290,7 +10290,7 @@
         </p:nvSpPr>
         <p:spPr>
           <a:xfrm>
-            <a:off x="1874519" y="3516199"/>
+            <a:off x="1874519" y="3513151"/>
             <a:ext cx="4572000" cy="548640"/>
           </a:xfrm>
           <a:prstGeom prst="rect">
@@ -10343,7 +10343,7 @@
         </p:nvSpPr>
         <p:spPr>
           <a:xfrm>
-            <a:off x="6629400" y="3516199"/>
+            <a:off x="6629400" y="3513151"/>
             <a:ext cx="4572000" cy="548640"/>
           </a:xfrm>
           <a:prstGeom prst="rect">
@@ -10396,7 +10396,7 @@
         </p:nvSpPr>
         <p:spPr>
           <a:xfrm>
-            <a:off x="1874519" y="4201999"/>
+            <a:off x="1874519" y="4198951"/>
             <a:ext cx="4572000" cy="548640"/>
           </a:xfrm>
           <a:prstGeom prst="rect">
@@ -10449,7 +10449,7 @@
         </p:nvSpPr>
         <p:spPr>
           <a:xfrm>
-            <a:off x="6629400" y="4201999"/>
+            <a:off x="6629400" y="4198951"/>
             <a:ext cx="4572000" cy="548640"/>
           </a:xfrm>
           <a:prstGeom prst="rect">
@@ -10502,7 +10502,7 @@
         </p:nvSpPr>
         <p:spPr>
           <a:xfrm>
-            <a:off x="777240" y="5207839"/>
+            <a:off x="777240" y="5204791"/>
             <a:ext cx="10607040" cy="548640"/>
           </a:xfrm>
           <a:prstGeom prst="rect">
@@ -11372,7 +11372,7 @@
       </p:sp>
       <p:pic>
         <p:nvPicPr>
-          <p:cNvPr id="9" name="Picture 8" descr="a9b3bfaec72a6e92.png"/>
+          <p:cNvPr id="9" name="Picture 8" descr="3799839d08455e03.png"/>
           <p:cNvPicPr>
             <a:picLocks noChangeAspect="1"/>
           </p:cNvPicPr>
@@ -11386,8 +11386,8 @@
         </p:blipFill>
         <p:spPr>
           <a:xfrm>
-            <a:off x="5596127" y="2103120"/>
-            <a:ext cx="969264" cy="1011936"/>
+            <a:off x="5588508" y="2103120"/>
+            <a:ext cx="984504" cy="1011936"/>
           </a:xfrm>
           <a:prstGeom prst="rect">
             <a:avLst/>
@@ -12307,7 +12307,7 @@
       </p:sp>
       <p:pic>
         <p:nvPicPr>
-          <p:cNvPr id="9" name="Picture 8" descr="85c3b95db630c6f5.png"/>
+          <p:cNvPr id="9" name="Picture 8" descr="59b8fc61a2c5e1f3.png"/>
           <p:cNvPicPr>
             <a:picLocks noChangeAspect="1"/>
           </p:cNvPicPr>
@@ -12321,8 +12321,8 @@
         </p:blipFill>
         <p:spPr>
           <a:xfrm>
-            <a:off x="5536692" y="2103120"/>
-            <a:ext cx="1088136" cy="1021080"/>
+            <a:off x="5529071" y="2103120"/>
+            <a:ext cx="1103376" cy="1014984"/>
           </a:xfrm>
           <a:prstGeom prst="rect">
             <a:avLst/>
@@ -12337,7 +12337,7 @@
         </p:nvSpPr>
         <p:spPr>
           <a:xfrm>
-            <a:off x="1828800" y="3398519"/>
+            <a:off x="1828800" y="3392424"/>
             <a:ext cx="8503920" cy="548640"/>
           </a:xfrm>
           <a:prstGeom prst="rect">
@@ -13968,7 +13968,7 @@
       </p:sp>
       <p:pic>
         <p:nvPicPr>
-          <p:cNvPr id="12" name="Picture 11" descr="6af21d554c0d0371.png"/>
+          <p:cNvPr id="12" name="Picture 11" descr="640cfb839fb05eeb.png"/>
           <p:cNvPicPr>
             <a:picLocks noChangeAspect="1"/>
           </p:cNvPicPr>
@@ -13982,8 +13982,8 @@
         </p:blipFill>
         <p:spPr>
           <a:xfrm>
-            <a:off x="5163312" y="2822448"/>
-            <a:ext cx="1834896" cy="344424"/>
+            <a:off x="5164835" y="2822448"/>
+            <a:ext cx="1831848" cy="344424"/>
           </a:xfrm>
           <a:prstGeom prst="rect">
             <a:avLst/>
@@ -14911,7 +14911,7 @@
         </p:nvSpPr>
         <p:spPr>
           <a:xfrm>
-            <a:off x="997268" y="2084831"/>
+            <a:off x="995744" y="2084831"/>
             <a:ext cx="2615224" cy="457200"/>
           </a:xfrm>
           <a:prstGeom prst="rect">
@@ -14940,7 +14940,7 @@
       </p:sp>
       <p:pic>
         <p:nvPicPr>
-          <p:cNvPr id="10" name="Picture 9" descr="a608046776132776.png"/>
+          <p:cNvPr id="10" name="Picture 9" descr="c94481d89f14e930.png"/>
           <p:cNvPicPr>
             <a:picLocks noChangeAspect="1"/>
           </p:cNvPicPr>
@@ -14954,8 +14954,8 @@
         </p:blipFill>
         <p:spPr>
           <a:xfrm>
-            <a:off x="3475333" y="2103120"/>
-            <a:ext cx="1335024" cy="420624"/>
+            <a:off x="3473809" y="2103120"/>
+            <a:ext cx="1338072" cy="420624"/>
           </a:xfrm>
           <a:prstGeom prst="rect">
             <a:avLst/>
@@ -14970,7 +14970,7 @@
         </p:nvSpPr>
         <p:spPr>
           <a:xfrm>
-            <a:off x="4810357" y="2084831"/>
+            <a:off x="4811881" y="2084831"/>
             <a:ext cx="956138" cy="457200"/>
           </a:xfrm>
           <a:prstGeom prst="rect">
@@ -14999,7 +14999,7 @@
       </p:sp>
       <p:pic>
         <p:nvPicPr>
-          <p:cNvPr id="12" name="Picture 11" descr="300f952ef0d53b3a.png"/>
+          <p:cNvPr id="12" name="Picture 11" descr="4b5d1eb2e4e078d4.png"/>
           <p:cNvPicPr>
             <a:picLocks noChangeAspect="1"/>
           </p:cNvPicPr>
@@ -15013,7 +15013,7 @@
         </p:blipFill>
         <p:spPr>
           <a:xfrm>
-            <a:off x="5629335" y="2133599"/>
+            <a:off x="5630859" y="2133599"/>
             <a:ext cx="5364480" cy="359664"/>
           </a:xfrm>
           <a:prstGeom prst="rect">
@@ -15029,7 +15029,7 @@
         </p:nvSpPr>
         <p:spPr>
           <a:xfrm>
-            <a:off x="10993815" y="2084831"/>
+            <a:off x="10995339" y="2084831"/>
             <a:ext cx="307595" cy="457200"/>
           </a:xfrm>
           <a:prstGeom prst="rect">
@@ -15093,7 +15093,7 @@
       </p:sp>
       <p:pic>
         <p:nvPicPr>
-          <p:cNvPr id="15" name="Picture 14" descr="7c47cd9abe6657c3.png"/>
+          <p:cNvPr id="15" name="Picture 14" descr="0a18efbc23f6589f.png"/>
           <p:cNvPicPr>
             <a:picLocks noChangeAspect="1"/>
           </p:cNvPicPr>
@@ -16695,7 +16695,7 @@
       </p:cxnSp>
       <p:pic>
         <p:nvPicPr>
-          <p:cNvPr id="11" name="Picture 10" descr="6c79f54b1c757244.png"/>
+          <p:cNvPr id="11" name="Picture 10" descr="857a6ff2cfd8fade.png"/>
           <p:cNvPicPr>
             <a:picLocks noChangeAspect="1"/>
           </p:cNvPicPr>
@@ -16709,8 +16709,8 @@
         </p:blipFill>
         <p:spPr>
           <a:xfrm>
-            <a:off x="2304024" y="2340864"/>
-            <a:ext cx="4245864" cy="414528"/>
+            <a:off x="2305548" y="2340864"/>
+            <a:ext cx="4242816" cy="411480"/>
           </a:xfrm>
           <a:prstGeom prst="rect">
             <a:avLst/>
@@ -16725,7 +16725,7 @@
         </p:nvSpPr>
         <p:spPr>
           <a:xfrm>
-            <a:off x="6549888" y="2319528"/>
+            <a:off x="6548364" y="2318004"/>
             <a:ext cx="1183151" cy="457200"/>
           </a:xfrm>
           <a:prstGeom prst="rect">
@@ -16754,7 +16754,7 @@
       </p:sp>
       <p:pic>
         <p:nvPicPr>
-          <p:cNvPr id="13" name="Picture 12" descr="dd1cb7111c0c43bb.png"/>
+          <p:cNvPr id="13" name="Picture 12" descr="60da0631a38069ce.png"/>
           <p:cNvPicPr>
             <a:picLocks noChangeAspect="1"/>
           </p:cNvPicPr>
@@ -16768,8 +16768,8 @@
         </p:blipFill>
         <p:spPr>
           <a:xfrm>
-            <a:off x="7595879" y="2394204"/>
-            <a:ext cx="2261616" cy="307848"/>
+            <a:off x="7594355" y="2391156"/>
+            <a:ext cx="2261616" cy="310896"/>
           </a:xfrm>
           <a:prstGeom prst="rect">
             <a:avLst/>
@@ -16778,7 +16778,7 @@
       </p:pic>
       <p:pic>
         <p:nvPicPr>
-          <p:cNvPr id="14" name="Picture 13" descr="70e3a362881c591e.png"/>
+          <p:cNvPr id="14" name="Picture 13" descr="4b863a17877190f0.png"/>
           <p:cNvPicPr>
             <a:picLocks noChangeAspect="1"/>
           </p:cNvPicPr>
@@ -16792,8 +16792,8 @@
         </p:blipFill>
         <p:spPr>
           <a:xfrm>
-            <a:off x="3560064" y="3029711"/>
-            <a:ext cx="5041392" cy="414528"/>
+            <a:off x="3561588" y="3026664"/>
+            <a:ext cx="5038344" cy="414528"/>
           </a:xfrm>
           <a:prstGeom prst="rect">
             <a:avLst/>
@@ -16808,7 +16808,7 @@
         </p:nvSpPr>
         <p:spPr>
           <a:xfrm>
-            <a:off x="987552" y="3782568"/>
+            <a:off x="987552" y="3779520"/>
             <a:ext cx="10131551" cy="475488"/>
           </a:xfrm>
           <a:prstGeom prst="rect">
@@ -16843,7 +16843,7 @@
         </p:nvSpPr>
         <p:spPr>
           <a:xfrm>
-            <a:off x="987552" y="4479035"/>
+            <a:off x="987552" y="4475988"/>
             <a:ext cx="5144240" cy="457200"/>
           </a:xfrm>
           <a:prstGeom prst="rect">
@@ -16872,7 +16872,7 @@
       </p:sp>
       <p:pic>
         <p:nvPicPr>
-          <p:cNvPr id="17" name="Picture 16" descr="255a243b3b0d185a.png"/>
+          <p:cNvPr id="17" name="Picture 16" descr="ec6e02736f5aa1af.png"/>
           <p:cNvPicPr>
             <a:picLocks noChangeAspect="1"/>
           </p:cNvPicPr>
@@ -16886,8 +16886,8 @@
         </p:blipFill>
         <p:spPr>
           <a:xfrm>
-            <a:off x="5994632" y="4495799"/>
-            <a:ext cx="2618232" cy="423672"/>
+            <a:off x="5994632" y="4492752"/>
+            <a:ext cx="2615184" cy="423672"/>
           </a:xfrm>
           <a:prstGeom prst="rect">
             <a:avLst/>
@@ -17194,7 +17194,7 @@
       </p:cxnSp>
       <p:pic>
         <p:nvPicPr>
-          <p:cNvPr id="10" name="Picture 9" descr="0679aec6529a1b12.png"/>
+          <p:cNvPr id="10" name="Picture 9" descr="12321aacc5af3d00.png"/>
           <p:cNvPicPr>
             <a:picLocks noChangeAspect="1"/>
           </p:cNvPicPr>
@@ -17208,7 +17208,7 @@
         </p:blipFill>
         <p:spPr>
           <a:xfrm>
-            <a:off x="2549388" y="2340864"/>
+            <a:off x="2550912" y="2340864"/>
             <a:ext cx="4224528" cy="411480"/>
           </a:xfrm>
           <a:prstGeom prst="rect">
@@ -17224,7 +17224,7 @@
         </p:nvSpPr>
         <p:spPr>
           <a:xfrm>
-            <a:off x="6773916" y="2318004"/>
+            <a:off x="6775440" y="2318004"/>
             <a:ext cx="1183151" cy="457200"/>
           </a:xfrm>
           <a:prstGeom prst="rect">
@@ -17253,7 +17253,7 @@
       </p:sp>
       <p:pic>
         <p:nvPicPr>
-          <p:cNvPr id="12" name="Picture 11" descr="c55ac5754a97199b.png"/>
+          <p:cNvPr id="12" name="Picture 11" descr="867b291b8947b8f7.png"/>
           <p:cNvPicPr>
             <a:picLocks noChangeAspect="1"/>
           </p:cNvPicPr>
@@ -17267,8 +17267,8 @@
         </p:blipFill>
         <p:spPr>
           <a:xfrm>
-            <a:off x="7819907" y="2372868"/>
-            <a:ext cx="1792224" cy="347472"/>
+            <a:off x="7821431" y="2372868"/>
+            <a:ext cx="1789176" cy="347472"/>
           </a:xfrm>
           <a:prstGeom prst="rect">
             <a:avLst/>
@@ -17277,7 +17277,7 @@
       </p:pic>
       <p:pic>
         <p:nvPicPr>
-          <p:cNvPr id="13" name="Picture 12" descr="6a71b95af9942a78.png"/>
+          <p:cNvPr id="13" name="Picture 12" descr="bf16b88015f4598f.png"/>
           <p:cNvPicPr>
             <a:picLocks noChangeAspect="1"/>
           </p:cNvPicPr>
@@ -17336,7 +17336,7 @@
       </p:sp>
       <p:pic>
         <p:nvPicPr>
-          <p:cNvPr id="15" name="Picture 14" descr="fd1a8388b368e1db.png"/>
+          <p:cNvPr id="15" name="Picture 14" descr="034c65761c567d79.png"/>
           <p:cNvPicPr>
             <a:picLocks noChangeAspect="1"/>
           </p:cNvPicPr>
@@ -17693,7 +17693,7 @@
       </p:cxnSp>
       <p:pic>
         <p:nvPicPr>
-          <p:cNvPr id="10" name="Picture 9" descr="c608c8ddc90838eb.png"/>
+          <p:cNvPr id="10" name="Picture 9" descr="99d46370b5095c02.png"/>
           <p:cNvPicPr>
             <a:picLocks noChangeAspect="1"/>
           </p:cNvPicPr>
@@ -17708,7 +17708,7 @@
         <p:spPr>
           <a:xfrm>
             <a:off x="2567676" y="2340864"/>
-            <a:ext cx="4267200" cy="807720"/>
+            <a:ext cx="4267200" cy="804672"/>
           </a:xfrm>
           <a:prstGeom prst="rect">
             <a:avLst/>
@@ -17723,7 +17723,7 @@
         </p:nvSpPr>
         <p:spPr>
           <a:xfrm>
-            <a:off x="6834876" y="2516124"/>
+            <a:off x="6834876" y="2514600"/>
             <a:ext cx="1183151" cy="457200"/>
           </a:xfrm>
           <a:prstGeom prst="rect">
@@ -17752,7 +17752,7 @@
       </p:sp>
       <p:pic>
         <p:nvPicPr>
-          <p:cNvPr id="12" name="Picture 11" descr="ad442dfcdf460139.png"/>
+          <p:cNvPr id="12" name="Picture 11" descr="3491f7c608f410f8.png"/>
           <p:cNvPicPr>
             <a:picLocks noChangeAspect="1"/>
           </p:cNvPicPr>
@@ -17767,7 +17767,7 @@
         <p:spPr>
           <a:xfrm>
             <a:off x="7880867" y="2406396"/>
-            <a:ext cx="1712976" cy="676656"/>
+            <a:ext cx="1712976" cy="673608"/>
           </a:xfrm>
           <a:prstGeom prst="rect">
             <a:avLst/>
@@ -17776,7 +17776,7 @@
       </p:pic>
       <p:pic>
         <p:nvPicPr>
-          <p:cNvPr id="13" name="Picture 12" descr="f9fd1262257d1ea0.png"/>
+          <p:cNvPr id="13" name="Picture 12" descr="47105fda582f1c15.png"/>
           <p:cNvPicPr>
             <a:picLocks noChangeAspect="1"/>
           </p:cNvPicPr>
@@ -17790,8 +17790,8 @@
         </p:blipFill>
         <p:spPr>
           <a:xfrm>
-            <a:off x="3142224" y="3422904"/>
-            <a:ext cx="1798320" cy="810768"/>
+            <a:off x="3131556" y="3419856"/>
+            <a:ext cx="1810512" cy="810768"/>
           </a:xfrm>
           <a:prstGeom prst="rect">
             <a:avLst/>
@@ -17806,7 +17806,7 @@
         </p:nvSpPr>
         <p:spPr>
           <a:xfrm>
-            <a:off x="4940544" y="3599688"/>
+            <a:off x="4942068" y="3596640"/>
             <a:ext cx="1183151" cy="457200"/>
           </a:xfrm>
           <a:prstGeom prst="rect">
@@ -17835,7 +17835,7 @@
       </p:sp>
       <p:pic>
         <p:nvPicPr>
-          <p:cNvPr id="15" name="Picture 14" descr="8939158b4e4e12e5.png"/>
+          <p:cNvPr id="15" name="Picture 14" descr="a171748372531ac1.png"/>
           <p:cNvPicPr>
             <a:picLocks noChangeAspect="1"/>
           </p:cNvPicPr>
@@ -17849,8 +17849,8 @@
         </p:blipFill>
         <p:spPr>
           <a:xfrm>
-            <a:off x="5986535" y="3422904"/>
-            <a:ext cx="3032760" cy="810768"/>
+            <a:off x="5988059" y="3419856"/>
+            <a:ext cx="3041904" cy="810768"/>
           </a:xfrm>
           <a:prstGeom prst="rect">
             <a:avLst/>
@@ -17865,7 +17865,7 @@
         </p:nvSpPr>
         <p:spPr>
           <a:xfrm>
-            <a:off x="987552" y="4572000"/>
+            <a:off x="987552" y="4568952"/>
             <a:ext cx="10131551" cy="475488"/>
           </a:xfrm>
           <a:prstGeom prst="rect">
@@ -18479,7 +18479,7 @@
       </p:sp>
       <p:pic>
         <p:nvPicPr>
-          <p:cNvPr id="9" name="Picture 8" descr="096cf6a78ea74f51.png"/>
+          <p:cNvPr id="9" name="Picture 8" descr="7cdcb68f6e6dc27f.png"/>
           <p:cNvPicPr>
             <a:picLocks noChangeAspect="1"/>
           </p:cNvPicPr>
@@ -18494,7 +18494,7 @@
         <p:spPr>
           <a:xfrm>
             <a:off x="1828800" y="1920240"/>
-            <a:ext cx="6004560" cy="423672"/>
+            <a:ext cx="6001512" cy="423672"/>
           </a:xfrm>
           <a:prstGeom prst="rect">
             <a:avLst/>
@@ -18509,8 +18509,8 @@
         </p:nvSpPr>
         <p:spPr>
           <a:xfrm>
-            <a:off x="8290560" y="1903476"/>
-            <a:ext cx="3093719" cy="502920"/>
+            <a:off x="8287511" y="1903476"/>
+            <a:ext cx="3096768" cy="502920"/>
           </a:xfrm>
           <a:prstGeom prst="rect">
             <a:avLst/>
@@ -18538,7 +18538,7 @@
       </p:sp>
       <p:pic>
         <p:nvPicPr>
-          <p:cNvPr id="11" name="Picture 10" descr="e9baf7b90d4047e0.png"/>
+          <p:cNvPr id="11" name="Picture 10" descr="96f6e768b7d39e47.png"/>
           <p:cNvPicPr>
             <a:picLocks noChangeAspect="1"/>
           </p:cNvPicPr>

--- a/a7/build/out/u3/A7 3.T1  Slides.pptx
+++ b/a7/build/out/u3/A7 3.T1  Slides.pptx
@@ -3817,7 +3817,7 @@
       </p:sp>
       <p:pic>
         <p:nvPicPr>
-          <p:cNvPr id="9" name="Picture 8" descr="6d1502d738698f68.png"/>
+          <p:cNvPr id="9" name="Picture 8" descr="28700badd3bdf097.png"/>
           <p:cNvPicPr>
             <a:picLocks noChangeAspect="1"/>
           </p:cNvPicPr>
@@ -3831,8 +3831,8 @@
         </p:blipFill>
         <p:spPr>
           <a:xfrm>
-            <a:off x="4628387" y="2194560"/>
-            <a:ext cx="2904744" cy="515112"/>
+            <a:off x="4629911" y="2194560"/>
+            <a:ext cx="2901696" cy="518160"/>
           </a:xfrm>
           <a:prstGeom prst="rect">
             <a:avLst/>
@@ -3847,7 +3847,7 @@
         </p:nvSpPr>
         <p:spPr>
           <a:xfrm>
-            <a:off x="777240" y="3029712"/>
+            <a:off x="777240" y="3032760"/>
             <a:ext cx="10607040" cy="429370"/>
           </a:xfrm>
           <a:prstGeom prst="rect">
@@ -4586,7 +4586,7 @@
       </p:sp>
       <p:pic>
         <p:nvPicPr>
-          <p:cNvPr id="9" name="Picture 8" descr="df4723f2aadc8f77.png"/>
+          <p:cNvPr id="9" name="Picture 8" descr="d5a2c92467f9be56.png"/>
           <p:cNvPicPr>
             <a:picLocks noChangeAspect="1"/>
           </p:cNvPicPr>
@@ -4601,7 +4601,7 @@
         <p:spPr>
           <a:xfrm>
             <a:off x="1828800" y="1920240"/>
-            <a:ext cx="2938272" cy="414528"/>
+            <a:ext cx="2941320" cy="411480"/>
           </a:xfrm>
           <a:prstGeom prst="rect">
             <a:avLst/>
@@ -4616,8 +4616,8 @@
         </p:nvSpPr>
         <p:spPr>
           <a:xfrm>
-            <a:off x="5224272" y="1898904"/>
-            <a:ext cx="6160008" cy="502920"/>
+            <a:off x="5227320" y="1897380"/>
+            <a:ext cx="6156959" cy="502920"/>
           </a:xfrm>
           <a:prstGeom prst="rect">
             <a:avLst/>
@@ -4645,7 +4645,7 @@
       </p:sp>
       <p:pic>
         <p:nvPicPr>
-          <p:cNvPr id="11" name="Picture 10" descr="4747b1c9061c5e79.png"/>
+          <p:cNvPr id="11" name="Picture 10" descr="8affb1101a179d43.png"/>
           <p:cNvPicPr>
             <a:picLocks noChangeAspect="1"/>
           </p:cNvPicPr>
@@ -4659,8 +4659,8 @@
         </p:blipFill>
         <p:spPr>
           <a:xfrm>
-            <a:off x="1828800" y="2609087"/>
-            <a:ext cx="5550408" cy="819912"/>
+            <a:off x="1828800" y="2606040"/>
+            <a:ext cx="5541264" cy="816864"/>
           </a:xfrm>
           <a:prstGeom prst="rect">
             <a:avLst/>
@@ -4675,8 +4675,8 @@
         </p:nvSpPr>
         <p:spPr>
           <a:xfrm>
-            <a:off x="7836408" y="2790443"/>
-            <a:ext cx="3547871" cy="502920"/>
+            <a:off x="7827263" y="2785872"/>
+            <a:ext cx="3557016" cy="502920"/>
           </a:xfrm>
           <a:prstGeom prst="rect">
             <a:avLst/>
@@ -5316,7 +5316,7 @@
       </p:sp>
       <p:pic>
         <p:nvPicPr>
-          <p:cNvPr id="9" name="Picture 8" descr="f9e02ef50b5c51f5.png"/>
+          <p:cNvPr id="9" name="Picture 8" descr="192ab9962e6dc882.png"/>
           <p:cNvPicPr>
             <a:picLocks noChangeAspect="1"/>
           </p:cNvPicPr>
@@ -5330,8 +5330,8 @@
         </p:blipFill>
         <p:spPr>
           <a:xfrm>
-            <a:off x="5426964" y="2194560"/>
-            <a:ext cx="1307592" cy="1213104"/>
+            <a:off x="5436107" y="2194560"/>
+            <a:ext cx="1289304" cy="1213104"/>
           </a:xfrm>
           <a:prstGeom prst="rect">
             <a:avLst/>
@@ -6066,7 +6066,7 @@
       </p:sp>
       <p:pic>
         <p:nvPicPr>
-          <p:cNvPr id="9" name="Picture 8" descr="a84fc3493309665e.png"/>
+          <p:cNvPr id="9" name="Picture 8" descr="20123ea625216e42.png"/>
           <p:cNvPicPr>
             <a:picLocks noChangeAspect="1"/>
           </p:cNvPicPr>
@@ -6804,7 +6804,7 @@
       </p:sp>
       <p:pic>
         <p:nvPicPr>
-          <p:cNvPr id="9" name="Picture 8" descr="9934c5774a372f4e.png"/>
+          <p:cNvPr id="9" name="Picture 8" descr="00e7a99be8e12d37.png"/>
           <p:cNvPicPr>
             <a:picLocks noChangeAspect="1"/>
           </p:cNvPicPr>
@@ -6818,8 +6818,8 @@
         </p:blipFill>
         <p:spPr>
           <a:xfrm>
-            <a:off x="5611367" y="2103120"/>
-            <a:ext cx="938784" cy="527304"/>
+            <a:off x="5612891" y="2103120"/>
+            <a:ext cx="935736" cy="524256"/>
           </a:xfrm>
           <a:prstGeom prst="rect">
             <a:avLst/>
@@ -6834,7 +6834,7 @@
         </p:nvSpPr>
         <p:spPr>
           <a:xfrm>
-            <a:off x="1828800" y="2904743"/>
+            <a:off x="1828800" y="2901695"/>
             <a:ext cx="8503920" cy="548640"/>
           </a:xfrm>
           <a:prstGeom prst="rect">
@@ -8310,7 +8310,7 @@
       </p:sp>
       <p:pic>
         <p:nvPicPr>
-          <p:cNvPr id="10" name="Picture 9" descr="d5b036b87b982f98.png"/>
+          <p:cNvPr id="10" name="Picture 9" descr="8f127f99c88fb83c.png"/>
           <p:cNvPicPr>
             <a:picLocks noChangeAspect="1"/>
           </p:cNvPicPr>
@@ -8404,7 +8404,7 @@
       </p:sp>
       <p:pic>
         <p:nvPicPr>
-          <p:cNvPr id="13" name="Picture 12" descr="3d798f50b853a791.png"/>
+          <p:cNvPr id="13" name="Picture 12" descr="8ee8aed49f7b7aa9.png"/>
           <p:cNvPicPr>
             <a:picLocks noChangeAspect="1"/>
           </p:cNvPicPr>
@@ -9248,7 +9248,7 @@
       </p:sp>
       <p:pic>
         <p:nvPicPr>
-          <p:cNvPr id="9" name="Picture 8" descr="b248a5ef36392be0.png"/>
+          <p:cNvPr id="9" name="Picture 8" descr="20518fcef0388b45.png"/>
           <p:cNvPicPr>
             <a:picLocks noChangeAspect="1"/>
           </p:cNvPicPr>
@@ -9263,7 +9263,7 @@
         <p:spPr>
           <a:xfrm>
             <a:off x="4757928" y="2103120"/>
-            <a:ext cx="2645664" cy="515112"/>
+            <a:ext cx="2645664" cy="518160"/>
           </a:xfrm>
           <a:prstGeom prst="rect">
             <a:avLst/>
@@ -9278,7 +9278,7 @@
         </p:nvSpPr>
         <p:spPr>
           <a:xfrm>
-            <a:off x="1828800" y="2892552"/>
+            <a:off x="1828800" y="2895599"/>
             <a:ext cx="8503920" cy="548640"/>
           </a:xfrm>
           <a:prstGeom prst="rect">
@@ -10225,7 +10225,7 @@
       </p:sp>
       <p:pic>
         <p:nvPicPr>
-          <p:cNvPr id="9" name="Picture 8" descr="5f877ce397a50d51.png"/>
+          <p:cNvPr id="9" name="Picture 8" descr="b63f3b3a75f7bb38.png"/>
           <p:cNvPicPr>
             <a:picLocks noChangeAspect="1"/>
           </p:cNvPicPr>
@@ -10240,7 +10240,7 @@
         <p:spPr>
           <a:xfrm>
             <a:off x="5407152" y="2103120"/>
-            <a:ext cx="1347216" cy="515112"/>
+            <a:ext cx="1347216" cy="518160"/>
           </a:xfrm>
           <a:prstGeom prst="rect">
             <a:avLst/>
@@ -10255,7 +10255,7 @@
         </p:nvSpPr>
         <p:spPr>
           <a:xfrm>
-            <a:off x="777240" y="2846832"/>
+            <a:off x="777240" y="2849879"/>
             <a:ext cx="10607040" cy="465151"/>
           </a:xfrm>
           <a:prstGeom prst="rect">
@@ -10290,7 +10290,7 @@
         </p:nvSpPr>
         <p:spPr>
           <a:xfrm>
-            <a:off x="1874519" y="3513151"/>
+            <a:off x="1874519" y="3516199"/>
             <a:ext cx="4572000" cy="548640"/>
           </a:xfrm>
           <a:prstGeom prst="rect">
@@ -10343,7 +10343,7 @@
         </p:nvSpPr>
         <p:spPr>
           <a:xfrm>
-            <a:off x="6629400" y="3513151"/>
+            <a:off x="6629400" y="3516199"/>
             <a:ext cx="4572000" cy="548640"/>
           </a:xfrm>
           <a:prstGeom prst="rect">
@@ -10396,7 +10396,7 @@
         </p:nvSpPr>
         <p:spPr>
           <a:xfrm>
-            <a:off x="1874519" y="4198951"/>
+            <a:off x="1874519" y="4201999"/>
             <a:ext cx="4572000" cy="548640"/>
           </a:xfrm>
           <a:prstGeom prst="rect">
@@ -10449,7 +10449,7 @@
         </p:nvSpPr>
         <p:spPr>
           <a:xfrm>
-            <a:off x="6629400" y="4198951"/>
+            <a:off x="6629400" y="4201999"/>
             <a:ext cx="4572000" cy="548640"/>
           </a:xfrm>
           <a:prstGeom prst="rect">
@@ -10502,7 +10502,7 @@
         </p:nvSpPr>
         <p:spPr>
           <a:xfrm>
-            <a:off x="777240" y="5204791"/>
+            <a:off x="777240" y="5207839"/>
             <a:ext cx="10607040" cy="548640"/>
           </a:xfrm>
           <a:prstGeom prst="rect">
@@ -11372,7 +11372,7 @@
       </p:sp>
       <p:pic>
         <p:nvPicPr>
-          <p:cNvPr id="9" name="Picture 8" descr="3799839d08455e03.png"/>
+          <p:cNvPr id="9" name="Picture 8" descr="57f74e63f18b45cb.png"/>
           <p:cNvPicPr>
             <a:picLocks noChangeAspect="1"/>
           </p:cNvPicPr>
@@ -11386,8 +11386,8 @@
         </p:blipFill>
         <p:spPr>
           <a:xfrm>
-            <a:off x="5588508" y="2103120"/>
-            <a:ext cx="984504" cy="1011936"/>
+            <a:off x="5597651" y="2103120"/>
+            <a:ext cx="966216" cy="1011936"/>
           </a:xfrm>
           <a:prstGeom prst="rect">
             <a:avLst/>
@@ -12307,7 +12307,7 @@
       </p:sp>
       <p:pic>
         <p:nvPicPr>
-          <p:cNvPr id="9" name="Picture 8" descr="59b8fc61a2c5e1f3.png"/>
+          <p:cNvPr id="9" name="Picture 8" descr="b4ec42ed5af64daf.png"/>
           <p:cNvPicPr>
             <a:picLocks noChangeAspect="1"/>
           </p:cNvPicPr>
@@ -12321,8 +12321,8 @@
         </p:blipFill>
         <p:spPr>
           <a:xfrm>
-            <a:off x="5529071" y="2103120"/>
-            <a:ext cx="1103376" cy="1014984"/>
+            <a:off x="5538215" y="2103120"/>
+            <a:ext cx="1085088" cy="1014984"/>
           </a:xfrm>
           <a:prstGeom prst="rect">
             <a:avLst/>
@@ -13968,7 +13968,7 @@
       </p:sp>
       <p:pic>
         <p:nvPicPr>
-          <p:cNvPr id="12" name="Picture 11" descr="640cfb839fb05eeb.png"/>
+          <p:cNvPr id="12" name="Picture 11" descr="9b87377120470530.png"/>
           <p:cNvPicPr>
             <a:picLocks noChangeAspect="1"/>
           </p:cNvPicPr>
@@ -13982,8 +13982,8 @@
         </p:blipFill>
         <p:spPr>
           <a:xfrm>
-            <a:off x="5164835" y="2822448"/>
-            <a:ext cx="1831848" cy="344424"/>
+            <a:off x="5163312" y="2822448"/>
+            <a:ext cx="1834896" cy="344424"/>
           </a:xfrm>
           <a:prstGeom prst="rect">
             <a:avLst/>
@@ -14940,7 +14940,7 @@
       </p:sp>
       <p:pic>
         <p:nvPicPr>
-          <p:cNvPr id="10" name="Picture 9" descr="c94481d89f14e930.png"/>
+          <p:cNvPr id="10" name="Picture 9" descr="c182d5e9af300148.png"/>
           <p:cNvPicPr>
             <a:picLocks noChangeAspect="1"/>
           </p:cNvPicPr>
@@ -14999,7 +14999,7 @@
       </p:sp>
       <p:pic>
         <p:nvPicPr>
-          <p:cNvPr id="12" name="Picture 11" descr="4b5d1eb2e4e078d4.png"/>
+          <p:cNvPr id="12" name="Picture 11" descr="633192d31288b52d.png"/>
           <p:cNvPicPr>
             <a:picLocks noChangeAspect="1"/>
           </p:cNvPicPr>
@@ -15064,7 +15064,7 @@
         </p:nvSpPr>
         <p:spPr>
           <a:xfrm>
-            <a:off x="1430629" y="2781299"/>
+            <a:off x="1429105" y="2781299"/>
             <a:ext cx="3534689" cy="457200"/>
           </a:xfrm>
           <a:prstGeom prst="rect">
@@ -15093,7 +15093,7 @@
       </p:sp>
       <p:pic>
         <p:nvPicPr>
-          <p:cNvPr id="15" name="Picture 14" descr="0a18efbc23f6589f.png"/>
+          <p:cNvPr id="15" name="Picture 14" descr="9c1cc680a1f0e7b2.png"/>
           <p:cNvPicPr>
             <a:picLocks noChangeAspect="1"/>
           </p:cNvPicPr>
@@ -15107,8 +15107,8 @@
         </p:blipFill>
         <p:spPr>
           <a:xfrm>
-            <a:off x="4828159" y="2798063"/>
-            <a:ext cx="1603248" cy="423672"/>
+            <a:off x="4826635" y="2798063"/>
+            <a:ext cx="1606296" cy="423672"/>
           </a:xfrm>
           <a:prstGeom prst="rect">
             <a:avLst/>
@@ -15123,7 +15123,7 @@
         </p:nvSpPr>
         <p:spPr>
           <a:xfrm>
-            <a:off x="6431407" y="2781299"/>
+            <a:off x="6432931" y="2781299"/>
             <a:ext cx="4436643" cy="457200"/>
           </a:xfrm>
           <a:prstGeom prst="rect">
@@ -16695,7 +16695,7 @@
       </p:cxnSp>
       <p:pic>
         <p:nvPicPr>
-          <p:cNvPr id="11" name="Picture 10" descr="857a6ff2cfd8fade.png"/>
+          <p:cNvPr id="11" name="Picture 10" descr="7f4dc7bb52f34966.png"/>
           <p:cNvPicPr>
             <a:picLocks noChangeAspect="1"/>
           </p:cNvPicPr>
@@ -16709,8 +16709,8 @@
         </p:blipFill>
         <p:spPr>
           <a:xfrm>
-            <a:off x="2305548" y="2340864"/>
-            <a:ext cx="4242816" cy="411480"/>
+            <a:off x="2304024" y="2340864"/>
+            <a:ext cx="4245864" cy="411480"/>
           </a:xfrm>
           <a:prstGeom prst="rect">
             <a:avLst/>
@@ -16725,7 +16725,7 @@
         </p:nvSpPr>
         <p:spPr>
           <a:xfrm>
-            <a:off x="6548364" y="2318004"/>
+            <a:off x="6549888" y="2318004"/>
             <a:ext cx="1183151" cy="457200"/>
           </a:xfrm>
           <a:prstGeom prst="rect">
@@ -16754,7 +16754,7 @@
       </p:sp>
       <p:pic>
         <p:nvPicPr>
-          <p:cNvPr id="13" name="Picture 12" descr="60da0631a38069ce.png"/>
+          <p:cNvPr id="13" name="Picture 12" descr="4bb1e456c94b13a6.png"/>
           <p:cNvPicPr>
             <a:picLocks noChangeAspect="1"/>
           </p:cNvPicPr>
@@ -16768,7 +16768,7 @@
         </p:blipFill>
         <p:spPr>
           <a:xfrm>
-            <a:off x="7594355" y="2391156"/>
+            <a:off x="7595879" y="2391156"/>
             <a:ext cx="2261616" cy="310896"/>
           </a:xfrm>
           <a:prstGeom prst="rect">
@@ -16778,7 +16778,7 @@
       </p:pic>
       <p:pic>
         <p:nvPicPr>
-          <p:cNvPr id="14" name="Picture 13" descr="4b863a17877190f0.png"/>
+          <p:cNvPr id="14" name="Picture 13" descr="a285865d99a08fcf.png"/>
           <p:cNvPicPr>
             <a:picLocks noChangeAspect="1"/>
           </p:cNvPicPr>
@@ -16792,8 +16792,8 @@
         </p:blipFill>
         <p:spPr>
           <a:xfrm>
-            <a:off x="3561588" y="3026664"/>
-            <a:ext cx="5038344" cy="414528"/>
+            <a:off x="3560064" y="3026664"/>
+            <a:ext cx="5041392" cy="411480"/>
           </a:xfrm>
           <a:prstGeom prst="rect">
             <a:avLst/>
@@ -16808,7 +16808,7 @@
         </p:nvSpPr>
         <p:spPr>
           <a:xfrm>
-            <a:off x="987552" y="3779520"/>
+            <a:off x="987552" y="3776472"/>
             <a:ext cx="10131551" cy="475488"/>
           </a:xfrm>
           <a:prstGeom prst="rect">
@@ -16843,7 +16843,7 @@
         </p:nvSpPr>
         <p:spPr>
           <a:xfrm>
-            <a:off x="987552" y="4475988"/>
+            <a:off x="987552" y="4472940"/>
             <a:ext cx="5144240" cy="457200"/>
           </a:xfrm>
           <a:prstGeom prst="rect">
@@ -16872,7 +16872,7 @@
       </p:sp>
       <p:pic>
         <p:nvPicPr>
-          <p:cNvPr id="17" name="Picture 16" descr="ec6e02736f5aa1af.png"/>
+          <p:cNvPr id="17" name="Picture 16" descr="2a950411e1004bb4.png"/>
           <p:cNvPicPr>
             <a:picLocks noChangeAspect="1"/>
           </p:cNvPicPr>
@@ -16886,8 +16886,8 @@
         </p:blipFill>
         <p:spPr>
           <a:xfrm>
-            <a:off x="5994632" y="4492752"/>
-            <a:ext cx="2615184" cy="423672"/>
+            <a:off x="5994632" y="4489704"/>
+            <a:ext cx="2618232" cy="423672"/>
           </a:xfrm>
           <a:prstGeom prst="rect">
             <a:avLst/>
@@ -17194,7 +17194,7 @@
       </p:cxnSp>
       <p:pic>
         <p:nvPicPr>
-          <p:cNvPr id="10" name="Picture 9" descr="12321aacc5af3d00.png"/>
+          <p:cNvPr id="10" name="Picture 9" descr="fe72c58bfa2a95e5.png"/>
           <p:cNvPicPr>
             <a:picLocks noChangeAspect="1"/>
           </p:cNvPicPr>
@@ -17208,8 +17208,8 @@
         </p:blipFill>
         <p:spPr>
           <a:xfrm>
-            <a:off x="2550912" y="2340864"/>
-            <a:ext cx="4224528" cy="411480"/>
+            <a:off x="2547864" y="2340864"/>
+            <a:ext cx="4227576" cy="411480"/>
           </a:xfrm>
           <a:prstGeom prst="rect">
             <a:avLst/>
@@ -17253,7 +17253,7 @@
       </p:sp>
       <p:pic>
         <p:nvPicPr>
-          <p:cNvPr id="12" name="Picture 11" descr="867b291b8947b8f7.png"/>
+          <p:cNvPr id="12" name="Picture 11" descr="f6f2fe1277a80fa5.png"/>
           <p:cNvPicPr>
             <a:picLocks noChangeAspect="1"/>
           </p:cNvPicPr>
@@ -17268,7 +17268,7 @@
         <p:spPr>
           <a:xfrm>
             <a:off x="7821431" y="2372868"/>
-            <a:ext cx="1789176" cy="347472"/>
+            <a:ext cx="1792224" cy="347472"/>
           </a:xfrm>
           <a:prstGeom prst="rect">
             <a:avLst/>
@@ -17277,7 +17277,7 @@
       </p:pic>
       <p:pic>
         <p:nvPicPr>
-          <p:cNvPr id="13" name="Picture 12" descr="bf16b88015f4598f.png"/>
+          <p:cNvPr id="13" name="Picture 12" descr="783225cb699ff896.png"/>
           <p:cNvPicPr>
             <a:picLocks noChangeAspect="1"/>
           </p:cNvPicPr>
@@ -17291,7 +17291,7 @@
         </p:blipFill>
         <p:spPr>
           <a:xfrm>
-            <a:off x="2000748" y="3026664"/>
+            <a:off x="1999224" y="3026664"/>
             <a:ext cx="3727704" cy="423672"/>
           </a:xfrm>
           <a:prstGeom prst="rect">
@@ -17307,7 +17307,7 @@
         </p:nvSpPr>
         <p:spPr>
           <a:xfrm>
-            <a:off x="5728452" y="3009900"/>
+            <a:off x="5726928" y="3009900"/>
             <a:ext cx="1183151" cy="457200"/>
           </a:xfrm>
           <a:prstGeom prst="rect">
@@ -17336,7 +17336,7 @@
       </p:sp>
       <p:pic>
         <p:nvPicPr>
-          <p:cNvPr id="15" name="Picture 14" descr="034c65761c567d79.png"/>
+          <p:cNvPr id="15" name="Picture 14" descr="1389c559d7859cab.png"/>
           <p:cNvPicPr>
             <a:picLocks noChangeAspect="1"/>
           </p:cNvPicPr>
@@ -17350,8 +17350,8 @@
         </p:blipFill>
         <p:spPr>
           <a:xfrm>
-            <a:off x="6774443" y="3026664"/>
-            <a:ext cx="3386328" cy="423672"/>
+            <a:off x="6772919" y="3026664"/>
+            <a:ext cx="3389376" cy="423672"/>
           </a:xfrm>
           <a:prstGeom prst="rect">
             <a:avLst/>
@@ -17693,7 +17693,7 @@
       </p:cxnSp>
       <p:pic>
         <p:nvPicPr>
-          <p:cNvPr id="10" name="Picture 9" descr="99d46370b5095c02.png"/>
+          <p:cNvPr id="10" name="Picture 9" descr="63942cbc98c315f3.png"/>
           <p:cNvPicPr>
             <a:picLocks noChangeAspect="1"/>
           </p:cNvPicPr>
@@ -17707,8 +17707,8 @@
         </p:blipFill>
         <p:spPr>
           <a:xfrm>
-            <a:off x="2567676" y="2340864"/>
-            <a:ext cx="4267200" cy="804672"/>
+            <a:off x="2566152" y="2340864"/>
+            <a:ext cx="4270248" cy="804672"/>
           </a:xfrm>
           <a:prstGeom prst="rect">
             <a:avLst/>
@@ -17723,7 +17723,7 @@
         </p:nvSpPr>
         <p:spPr>
           <a:xfrm>
-            <a:off x="6834876" y="2514600"/>
+            <a:off x="6836400" y="2514600"/>
             <a:ext cx="1183151" cy="457200"/>
           </a:xfrm>
           <a:prstGeom prst="rect">
@@ -17752,7 +17752,7 @@
       </p:sp>
       <p:pic>
         <p:nvPicPr>
-          <p:cNvPr id="12" name="Picture 11" descr="3491f7c608f410f8.png"/>
+          <p:cNvPr id="12" name="Picture 11" descr="90de12726cf0d0d8.png"/>
           <p:cNvPicPr>
             <a:picLocks noChangeAspect="1"/>
           </p:cNvPicPr>
@@ -17766,7 +17766,7 @@
         </p:blipFill>
         <p:spPr>
           <a:xfrm>
-            <a:off x="7880867" y="2406396"/>
+            <a:off x="7882391" y="2406396"/>
             <a:ext cx="1712976" cy="673608"/>
           </a:xfrm>
           <a:prstGeom prst="rect">
@@ -17776,7 +17776,7 @@
       </p:pic>
       <p:pic>
         <p:nvPicPr>
-          <p:cNvPr id="13" name="Picture 12" descr="47105fda582f1c15.png"/>
+          <p:cNvPr id="13" name="Picture 12" descr="56477ae8447c4609.png"/>
           <p:cNvPicPr>
             <a:picLocks noChangeAspect="1"/>
           </p:cNvPicPr>
@@ -17790,8 +17790,8 @@
         </p:blipFill>
         <p:spPr>
           <a:xfrm>
-            <a:off x="3131556" y="3419856"/>
-            <a:ext cx="1810512" cy="810768"/>
+            <a:off x="3140700" y="3419856"/>
+            <a:ext cx="1801368" cy="810768"/>
           </a:xfrm>
           <a:prstGeom prst="rect">
             <a:avLst/>
@@ -17835,7 +17835,7 @@
       </p:sp>
       <p:pic>
         <p:nvPicPr>
-          <p:cNvPr id="15" name="Picture 14" descr="a171748372531ac1.png"/>
+          <p:cNvPr id="15" name="Picture 14" descr="7b39cdb0ef566bc5.png"/>
           <p:cNvPicPr>
             <a:picLocks noChangeAspect="1"/>
           </p:cNvPicPr>
@@ -17849,8 +17849,8 @@
         </p:blipFill>
         <p:spPr>
           <a:xfrm>
-            <a:off x="5988059" y="3419856"/>
-            <a:ext cx="3041904" cy="810768"/>
+            <a:off x="5988059" y="3421379"/>
+            <a:ext cx="3032760" cy="807720"/>
           </a:xfrm>
           <a:prstGeom prst="rect">
             <a:avLst/>
@@ -18479,7 +18479,7 @@
       </p:sp>
       <p:pic>
         <p:nvPicPr>
-          <p:cNvPr id="9" name="Picture 8" descr="7cdcb68f6e6dc27f.png"/>
+          <p:cNvPr id="9" name="Picture 8" descr="de63dedae86b58c0.png"/>
           <p:cNvPicPr>
             <a:picLocks noChangeAspect="1"/>
           </p:cNvPicPr>
@@ -18494,7 +18494,7 @@
         <p:spPr>
           <a:xfrm>
             <a:off x="1828800" y="1920240"/>
-            <a:ext cx="6001512" cy="423672"/>
+            <a:ext cx="6004560" cy="423672"/>
           </a:xfrm>
           <a:prstGeom prst="rect">
             <a:avLst/>
@@ -18509,8 +18509,8 @@
         </p:nvSpPr>
         <p:spPr>
           <a:xfrm>
-            <a:off x="8287511" y="1903476"/>
-            <a:ext cx="3096768" cy="502920"/>
+            <a:off x="8290560" y="1903476"/>
+            <a:ext cx="3093719" cy="502920"/>
           </a:xfrm>
           <a:prstGeom prst="rect">
             <a:avLst/>
@@ -18538,7 +18538,7 @@
       </p:sp>
       <p:pic>
         <p:nvPicPr>
-          <p:cNvPr id="11" name="Picture 10" descr="96f6e768b7d39e47.png"/>
+          <p:cNvPr id="11" name="Picture 10" descr="2f53120bf9dfffe2.png"/>
           <p:cNvPicPr>
             <a:picLocks noChangeAspect="1"/>
           </p:cNvPicPr>

--- a/a7/build/out/u3/A7 3.T1  Slides.pptx
+++ b/a7/build/out/u3/A7 3.T1  Slides.pptx
@@ -10908,7 +10908,7 @@
                 </a:solidFill>
                 <a:latin typeface="Century Schoolbook"/>
               </a:rPr>
-              <a:t>6</a:t>
+              <a:t>10</a:t>
             </a:r>
           </a:p>
         </p:txBody>
@@ -10961,7 +10961,7 @@
                 </a:solidFill>
                 <a:latin typeface="Century Schoolbook"/>
               </a:rPr>
-              <a:t>4</a:t>
+              <a:t>6</a:t>
             </a:r>
           </a:p>
         </p:txBody>
@@ -11067,7 +11067,7 @@
                 </a:solidFill>
                 <a:latin typeface="Century Schoolbook"/>
               </a:rPr>
-              <a:t>10</a:t>
+              <a:t>4</a:t>
             </a:r>
           </a:p>
         </p:txBody>
@@ -11455,29 +11455,29 @@
             <a:r>
               <a:rPr sz="2400" b="1" i="0">
                 <a:solidFill>
-                  <a:srgbClr val="9E1B32"/>
+                  <a:srgbClr val="1A1A1A"/>
                 </a:solidFill>
                 <a:latin typeface="Century Schoolbook"/>
               </a:rPr>
               <a:t>A.   </a:t>
             </a:r>
             <a:r>
-              <a:rPr sz="2400" b="1" i="0">
-                <a:solidFill>
-                  <a:srgbClr val="9E1B32"/>
+              <a:rPr sz="2400" b="0" i="0">
+                <a:solidFill>
+                  <a:srgbClr val="1A1A1A"/>
                 </a:solidFill>
                 <a:latin typeface="Century Schoolbook"/>
               </a:rPr>
               <a:t>4x</a:t>
             </a:r>
             <a:r>
-              <a:rPr sz="2400" b="1" i="0" baseline="30000">
-                <a:solidFill>
-                  <a:srgbClr val="9E1B32"/>
-                </a:solidFill>
-                <a:latin typeface="Century Schoolbook"/>
-              </a:rPr>
-              <a:t>6</a:t>
+              <a:rPr sz="2400" b="0" i="0" baseline="30000">
+                <a:solidFill>
+                  <a:srgbClr val="1A1A1A"/>
+                </a:solidFill>
+                <a:latin typeface="Century Schoolbook"/>
+              </a:rPr>
+              <a:t>10</a:t>
             </a:r>
           </a:p>
         </p:txBody>
@@ -11508,29 +11508,29 @@
             <a:r>
               <a:rPr sz="2400" b="1" i="0">
                 <a:solidFill>
-                  <a:srgbClr val="1A1A1A"/>
+                  <a:srgbClr val="9E1B32"/>
                 </a:solidFill>
                 <a:latin typeface="Century Schoolbook"/>
               </a:rPr>
               <a:t>B.   </a:t>
             </a:r>
             <a:r>
-              <a:rPr sz="2400" b="0" i="0">
-                <a:solidFill>
-                  <a:srgbClr val="1A1A1A"/>
+              <a:rPr sz="2400" b="1" i="0">
+                <a:solidFill>
+                  <a:srgbClr val="9E1B32"/>
                 </a:solidFill>
                 <a:latin typeface="Century Schoolbook"/>
               </a:rPr>
               <a:t>4x</a:t>
             </a:r>
             <a:r>
-              <a:rPr sz="2400" b="0" i="0" baseline="30000">
-                <a:solidFill>
-                  <a:srgbClr val="1A1A1A"/>
-                </a:solidFill>
-                <a:latin typeface="Century Schoolbook"/>
-              </a:rPr>
-              <a:t>4</a:t>
+              <a:rPr sz="2400" b="1" i="0" baseline="30000">
+                <a:solidFill>
+                  <a:srgbClr val="9E1B32"/>
+                </a:solidFill>
+                <a:latin typeface="Century Schoolbook"/>
+              </a:rPr>
+              <a:t>6</a:t>
             </a:r>
           </a:p>
         </p:txBody>
@@ -11636,7 +11636,7 @@
                 </a:solidFill>
                 <a:latin typeface="Century Schoolbook"/>
               </a:rPr>
-              <a:t>10</a:t>
+              <a:t>4</a:t>
             </a:r>
           </a:p>
         </p:txBody>
@@ -11671,7 +11671,7 @@
                 </a:solidFill>
                 <a:latin typeface="Century Schoolbook"/>
               </a:rPr>
-              <a:t>Answer:   A — 4x</a:t>
+              <a:t>Answer:   B — 4x</a:t>
             </a:r>
             <a:r>
               <a:rPr sz="3200" b="1" i="0" baseline="30000">

--- a/a7/build/out/u3/A7 3.T1  Slides.pptx
+++ b/a7/build/out/u3/A7 3.T1  Slides.pptx
@@ -7191,8 +7191,8 @@
         </p:nvSpPr>
         <p:spPr>
           <a:xfrm>
-            <a:off x="3256587" y="2171700"/>
-            <a:ext cx="2996052" cy="457200"/>
+            <a:off x="1234440" y="1851660"/>
+            <a:ext cx="2931371" cy="457200"/>
           </a:xfrm>
           <a:prstGeom prst="rect">
             <a:avLst/>
@@ -7207,20 +7207,20 @@
           <a:p>
             <a:pPr algn="l"/>
             <a:r>
-              <a:rPr sz="2600" b="0" i="0">
+              <a:rPr sz="2400" b="0" i="0">
                 <a:solidFill>
                   <a:srgbClr val="1A1A1A"/>
                 </a:solidFill>
                 <a:latin typeface="Century Schoolbook"/>
               </a:rPr>
-              <a:t>A cube has edge  </a:t>
+              <a:t>A cube has edges  </a:t>
             </a:r>
           </a:p>
         </p:txBody>
       </p:sp>
       <p:pic>
         <p:nvPicPr>
-          <p:cNvPr id="10" name="Picture 9" descr="7234be0b0114cb8c.png"/>
+          <p:cNvPr id="10" name="Picture 9" descr="1df02a95485ce3ed.png"/>
           <p:cNvPicPr>
             <a:picLocks noChangeAspect="1"/>
           </p:cNvPicPr>
@@ -7234,8 +7234,8 @@
         </p:blipFill>
         <p:spPr>
           <a:xfrm>
-            <a:off x="6115479" y="2228088"/>
-            <a:ext cx="524256" cy="344424"/>
+            <a:off x="4028651" y="1941575"/>
+            <a:ext cx="423672" cy="277368"/>
           </a:xfrm>
           <a:prstGeom prst="rect">
             <a:avLst/>
@@ -7250,8 +7250,8 @@
         </p:nvSpPr>
         <p:spPr>
           <a:xfrm>
-            <a:off x="6639735" y="2171700"/>
-            <a:ext cx="2402356" cy="457200"/>
+            <a:off x="4452323" y="1851660"/>
+            <a:ext cx="2957822" cy="457200"/>
           </a:xfrm>
           <a:prstGeom prst="rect">
             <a:avLst/>
@@ -7266,13 +7266,13 @@
           <a:p>
             <a:pPr algn="l"/>
             <a:r>
-              <a:rPr sz="2600" b="0" i="0">
+              <a:rPr sz="2400" b="0" i="0">
                 <a:solidFill>
                   <a:srgbClr val="1A1A1A"/>
                 </a:solidFill>
                 <a:latin typeface="Century Schoolbook"/>
               </a:rPr>
-              <a:t>  centimeters.</a:t>
+              <a:t>  centimeters long.</a:t>
             </a:r>
           </a:p>
         </p:txBody>
@@ -7285,8 +7285,8 @@
         </p:nvSpPr>
         <p:spPr>
           <a:xfrm>
-            <a:off x="2402791" y="2857500"/>
-            <a:ext cx="3303995" cy="457200"/>
+            <a:off x="1234440" y="2464308"/>
+            <a:ext cx="3066149" cy="457200"/>
           </a:xfrm>
           <a:prstGeom prst="rect">
             <a:avLst/>
@@ -7301,7 +7301,7 @@
           <a:p>
             <a:pPr algn="l"/>
             <a:r>
-              <a:rPr sz="2600" b="0" i="0">
+              <a:rPr sz="2400" b="0" i="0">
                 <a:solidFill>
                   <a:srgbClr val="1A1A1A"/>
                 </a:solidFill>
@@ -7314,7 +7314,7 @@
       </p:sp>
       <p:pic>
         <p:nvPicPr>
-          <p:cNvPr id="13" name="Picture 12" descr="cf9ea632c43208c2.png"/>
+          <p:cNvPr id="13" name="Picture 12" descr="84641c90e2ee9154.png"/>
           <p:cNvPicPr>
             <a:picLocks noChangeAspect="1"/>
           </p:cNvPicPr>
@@ -7328,8 +7328,8 @@
         </p:blipFill>
         <p:spPr>
           <a:xfrm>
-            <a:off x="5569627" y="2912364"/>
-            <a:ext cx="734568" cy="347472"/>
+            <a:off x="4163429" y="2554224"/>
+            <a:ext cx="597408" cy="277368"/>
           </a:xfrm>
           <a:prstGeom prst="rect">
             <a:avLst/>
@@ -7344,8 +7344,8 @@
         </p:nvSpPr>
         <p:spPr>
           <a:xfrm>
-            <a:off x="6304195" y="2857500"/>
-            <a:ext cx="3591692" cy="457200"/>
+            <a:off x="4760837" y="2464308"/>
+            <a:ext cx="3331708" cy="457200"/>
           </a:xfrm>
           <a:prstGeom prst="rect">
             <a:avLst/>
@@ -7360,7 +7360,7 @@
           <a:p>
             <a:pPr algn="l"/>
             <a:r>
-              <a:rPr sz="2600" b="0" i="0">
+              <a:rPr sz="2400" b="0" i="0">
                 <a:solidFill>
                   <a:srgbClr val="1A1A1A"/>
                 </a:solidFill>
@@ -7379,29 +7379,29 @@
         </p:nvSpPr>
         <p:spPr>
           <a:xfrm>
-            <a:off x="777240" y="3566160"/>
-            <a:ext cx="10607040" cy="465151"/>
-          </a:xfrm>
-          <a:prstGeom prst="rect">
-            <a:avLst/>
-          </a:prstGeom>
-          <a:noFill/>
-        </p:spPr>
-        <p:txBody>
-          <a:bodyPr wrap="square" lIns="45720" rIns="45720" tIns="18288" bIns="18288" anchor="t">
-            <a:spAutoFit/>
-          </a:bodyPr>
-          <a:lstStyle/>
-          <a:p>
-            <a:pPr algn="ctr"/>
-            <a:r>
-              <a:rPr sz="2600" b="0" i="0">
+            <a:off x="1234440" y="3099816"/>
+            <a:ext cx="10058400" cy="429370"/>
+          </a:xfrm>
+          <a:prstGeom prst="rect">
+            <a:avLst/>
+          </a:prstGeom>
+          <a:noFill/>
+        </p:spPr>
+        <p:txBody>
+          <a:bodyPr wrap="square" lIns="45720" rIns="45720" tIns="18288" bIns="18288" anchor="t">
+            <a:spAutoFit/>
+          </a:bodyPr>
+          <a:lstStyle/>
+          <a:p>
+            <a:pPr algn="l"/>
+            <a:r>
+              <a:rPr sz="2400" b="1" i="0">
                 <a:solidFill>
                   <a:srgbClr val="1A1A1A"/>
                 </a:solidFill>
                 <a:latin typeface="Century Schoolbook"/>
               </a:rPr>
-              <a:t>Write the cube's volume as a single monomial.</a:t>
+              <a:t>Write its volume as a single monomial.</a:t>
             </a:r>
           </a:p>
         </p:txBody>
@@ -7437,41 +7437,6 @@
                 <a:latin typeface="Century Schoolbook"/>
               </a:rPr>
               <a:t>Answer it.</a:t>
-            </a:r>
-          </a:p>
-        </p:txBody>
-      </p:sp>
-      <p:sp>
-        <p:nvSpPr>
-          <p:cNvPr id="17" name="TextBox 16"/>
-          <p:cNvSpPr txBox="1"/>
-          <p:nvPr/>
-        </p:nvSpPr>
-        <p:spPr>
-          <a:xfrm>
-            <a:off x="777240" y="4828032"/>
-            <a:ext cx="10607040" cy="365760"/>
-          </a:xfrm>
-          <a:prstGeom prst="rect">
-            <a:avLst/>
-          </a:prstGeom>
-          <a:noFill/>
-        </p:spPr>
-        <p:txBody>
-          <a:bodyPr wrap="square" lIns="45720" rIns="45720" tIns="18288" bIns="18288" anchor="t">
-            <a:spAutoFit/>
-          </a:bodyPr>
-          <a:lstStyle/>
-          <a:p>
-            <a:pPr algn="ctr"/>
-            <a:r>
-              <a:rPr sz="1900" b="0" i="1">
-                <a:solidFill>
-                  <a:srgbClr val="6B6B6B"/>
-                </a:solidFill>
-                <a:latin typeface="Century Schoolbook"/>
-              </a:rPr>
-              <a:t>Write as a single monomial.</a:t>
             </a:r>
           </a:p>
         </p:txBody>
@@ -8281,8 +8246,8 @@
         </p:nvSpPr>
         <p:spPr>
           <a:xfrm>
-            <a:off x="3256587" y="2080260"/>
-            <a:ext cx="2996052" cy="457200"/>
+            <a:off x="1234440" y="1851660"/>
+            <a:ext cx="2931371" cy="457200"/>
           </a:xfrm>
           <a:prstGeom prst="rect">
             <a:avLst/>
@@ -8297,20 +8262,20 @@
           <a:p>
             <a:pPr algn="l"/>
             <a:r>
-              <a:rPr sz="2600" b="0" i="0">
+              <a:rPr sz="2400" b="0" i="0">
                 <a:solidFill>
                   <a:srgbClr val="1A1A1A"/>
                 </a:solidFill>
                 <a:latin typeface="Century Schoolbook"/>
               </a:rPr>
-              <a:t>A cube has edge  </a:t>
+              <a:t>A cube has edges  </a:t>
             </a:r>
           </a:p>
         </p:txBody>
       </p:sp>
       <p:pic>
         <p:nvPicPr>
-          <p:cNvPr id="10" name="Picture 9" descr="8f127f99c88fb83c.png"/>
+          <p:cNvPr id="10" name="Picture 9" descr="a28e2ea3731f9d8f.png"/>
           <p:cNvPicPr>
             <a:picLocks noChangeAspect="1"/>
           </p:cNvPicPr>
@@ -8324,8 +8289,8 @@
         </p:blipFill>
         <p:spPr>
           <a:xfrm>
-            <a:off x="6115479" y="2136648"/>
-            <a:ext cx="524256" cy="344424"/>
+            <a:off x="4028651" y="1941575"/>
+            <a:ext cx="423672" cy="277368"/>
           </a:xfrm>
           <a:prstGeom prst="rect">
             <a:avLst/>
@@ -8340,8 +8305,8 @@
         </p:nvSpPr>
         <p:spPr>
           <a:xfrm>
-            <a:off x="6639735" y="2080260"/>
-            <a:ext cx="2402356" cy="457200"/>
+            <a:off x="4452323" y="1851660"/>
+            <a:ext cx="2957822" cy="457200"/>
           </a:xfrm>
           <a:prstGeom prst="rect">
             <a:avLst/>
@@ -8356,13 +8321,13 @@
           <a:p>
             <a:pPr algn="l"/>
             <a:r>
-              <a:rPr sz="2600" b="0" i="0">
+              <a:rPr sz="2400" b="0" i="0">
                 <a:solidFill>
                   <a:srgbClr val="1A1A1A"/>
                 </a:solidFill>
                 <a:latin typeface="Century Schoolbook"/>
               </a:rPr>
-              <a:t>  centimeters.</a:t>
+              <a:t>  centimeters long.</a:t>
             </a:r>
           </a:p>
         </p:txBody>
@@ -8375,8 +8340,8 @@
         </p:nvSpPr>
         <p:spPr>
           <a:xfrm>
-            <a:off x="2402791" y="2766060"/>
-            <a:ext cx="3303995" cy="457200"/>
+            <a:off x="1234440" y="2464308"/>
+            <a:ext cx="3066149" cy="457200"/>
           </a:xfrm>
           <a:prstGeom prst="rect">
             <a:avLst/>
@@ -8391,7 +8356,7 @@
           <a:p>
             <a:pPr algn="l"/>
             <a:r>
-              <a:rPr sz="2600" b="0" i="0">
+              <a:rPr sz="2400" b="0" i="0">
                 <a:solidFill>
                   <a:srgbClr val="1A1A1A"/>
                 </a:solidFill>
@@ -8404,7 +8369,7 @@
       </p:sp>
       <p:pic>
         <p:nvPicPr>
-          <p:cNvPr id="13" name="Picture 12" descr="8ee8aed49f7b7aa9.png"/>
+          <p:cNvPr id="13" name="Picture 12" descr="627f906189b40b96.png"/>
           <p:cNvPicPr>
             <a:picLocks noChangeAspect="1"/>
           </p:cNvPicPr>
@@ -8418,8 +8383,8 @@
         </p:blipFill>
         <p:spPr>
           <a:xfrm>
-            <a:off x="5569627" y="2820924"/>
-            <a:ext cx="734568" cy="347472"/>
+            <a:off x="4163429" y="2554224"/>
+            <a:ext cx="600456" cy="277368"/>
           </a:xfrm>
           <a:prstGeom prst="rect">
             <a:avLst/>
@@ -8434,8 +8399,8 @@
         </p:nvSpPr>
         <p:spPr>
           <a:xfrm>
-            <a:off x="6304195" y="2766060"/>
-            <a:ext cx="3591692" cy="457200"/>
+            <a:off x="4763885" y="2464308"/>
+            <a:ext cx="3331708" cy="457200"/>
           </a:xfrm>
           <a:prstGeom prst="rect">
             <a:avLst/>
@@ -8450,7 +8415,7 @@
           <a:p>
             <a:pPr algn="l"/>
             <a:r>
-              <a:rPr sz="2600" b="0" i="0">
+              <a:rPr sz="2400" b="0" i="0">
                 <a:solidFill>
                   <a:srgbClr val="1A1A1A"/>
                 </a:solidFill>
@@ -8469,8 +8434,43 @@
         </p:nvSpPr>
         <p:spPr>
           <a:xfrm>
-            <a:off x="777240" y="3474720"/>
-            <a:ext cx="10607040" cy="465151"/>
+            <a:off x="1234440" y="3099816"/>
+            <a:ext cx="10058400" cy="429370"/>
+          </a:xfrm>
+          <a:prstGeom prst="rect">
+            <a:avLst/>
+          </a:prstGeom>
+          <a:noFill/>
+        </p:spPr>
+        <p:txBody>
+          <a:bodyPr wrap="square" lIns="45720" rIns="45720" tIns="18288" bIns="18288" anchor="t">
+            <a:spAutoFit/>
+          </a:bodyPr>
+          <a:lstStyle/>
+          <a:p>
+            <a:pPr algn="l"/>
+            <a:r>
+              <a:rPr sz="2400" b="1" i="0">
+                <a:solidFill>
+                  <a:srgbClr val="1A1A1A"/>
+                </a:solidFill>
+                <a:latin typeface="Century Schoolbook"/>
+              </a:rPr>
+              <a:t>Write its volume as a single monomial.</a:t>
+            </a:r>
+          </a:p>
+        </p:txBody>
+      </p:sp>
+      <p:sp>
+        <p:nvSpPr>
+          <p:cNvPr id="16" name="TextBox 15"/>
+          <p:cNvSpPr txBox="1"/>
+          <p:nvPr/>
+        </p:nvSpPr>
+        <p:spPr>
+          <a:xfrm>
+            <a:off x="1828800" y="3730354"/>
+            <a:ext cx="8503920" cy="548640"/>
           </a:xfrm>
           <a:prstGeom prst="rect">
             <a:avLst/>
@@ -8485,41 +8485,6 @@
           <a:p>
             <a:pPr algn="ctr"/>
             <a:r>
-              <a:rPr sz="2600" b="0" i="0">
-                <a:solidFill>
-                  <a:srgbClr val="1A1A1A"/>
-                </a:solidFill>
-                <a:latin typeface="Century Schoolbook"/>
-              </a:rPr>
-              <a:t>Write the cube's volume as a single monomial.</a:t>
-            </a:r>
-          </a:p>
-        </p:txBody>
-      </p:sp>
-      <p:sp>
-        <p:nvSpPr>
-          <p:cNvPr id="16" name="TextBox 15"/>
-          <p:cNvSpPr txBox="1"/>
-          <p:nvPr/>
-        </p:nvSpPr>
-        <p:spPr>
-          <a:xfrm>
-            <a:off x="1828800" y="4095319"/>
-            <a:ext cx="8503920" cy="548640"/>
-          </a:xfrm>
-          <a:prstGeom prst="rect">
-            <a:avLst/>
-          </a:prstGeom>
-          <a:noFill/>
-        </p:spPr>
-        <p:txBody>
-          <a:bodyPr wrap="square" lIns="45720" rIns="45720" tIns="18288" bIns="18288" anchor="t">
-            <a:spAutoFit/>
-          </a:bodyPr>
-          <a:lstStyle/>
-          <a:p>
-            <a:pPr algn="ctr"/>
-            <a:r>
               <a:rPr sz="2400" b="0" i="0">
                 <a:solidFill>
                   <a:srgbClr val="6B6B6B"/>
@@ -8575,7 +8540,7 @@
         </p:nvSpPr>
         <p:spPr>
           <a:xfrm>
-            <a:off x="4797551" y="4768927"/>
+            <a:off x="4797551" y="4605528"/>
             <a:ext cx="1920240" cy="548640"/>
           </a:xfrm>
           <a:prstGeom prst="rect">
@@ -8618,7 +8583,7 @@
         </p:blipFill>
         <p:spPr>
           <a:xfrm>
-            <a:off x="6717791" y="4826839"/>
+            <a:off x="6717791" y="4663440"/>
             <a:ext cx="646176" cy="432816"/>
           </a:xfrm>
           <a:prstGeom prst="rect">

--- a/a7/build/out/u3/A7 3.T1  Slides.pptx
+++ b/a7/build/out/u3/A7 3.T1  Slides.pptx
@@ -7401,7 +7401,7 @@
                 </a:solidFill>
                 <a:latin typeface="Century Schoolbook"/>
               </a:rPr>
-              <a:t>Write its volume as a single monomial.</a:t>
+              <a:t>What is the volume of the cube, in cubic centimeters?</a:t>
             </a:r>
           </a:p>
         </p:txBody>
@@ -8456,7 +8456,7 @@
                 </a:solidFill>
                 <a:latin typeface="Century Schoolbook"/>
               </a:rPr>
-              <a:t>Write its volume as a single monomial.</a:t>
+              <a:t>What is the volume of the cube, in cubic centimeters?</a:t>
             </a:r>
           </a:p>
         </p:txBody>

--- a/a7/build/out/u3/A7 3.T1  Slides.pptx
+++ b/a7/build/out/u3/A7 3.T1  Slides.pptx
@@ -15159,7 +15159,7 @@
         <p:spPr>
           <a:xfrm>
             <a:off x="777240" y="4663440"/>
-            <a:ext cx="10607040" cy="548640"/>
+            <a:ext cx="10607040" cy="1072896"/>
           </a:xfrm>
           <a:prstGeom prst="rect">
             <a:avLst/>
